--- a/présentation powerpoint/Présentation des résultats Claire.pptx
+++ b/présentation powerpoint/Présentation des résultats Claire.pptx
@@ -9,6 +9,21 @@
     <p:sldId id="258" r:id="rId3"/>
     <p:sldId id="257" r:id="rId4"/>
     <p:sldId id="259" r:id="rId5"/>
+    <p:sldId id="260" r:id="rId6"/>
+    <p:sldId id="261" r:id="rId7"/>
+    <p:sldId id="262" r:id="rId8"/>
+    <p:sldId id="263" r:id="rId9"/>
+    <p:sldId id="264" r:id="rId10"/>
+    <p:sldId id="265" r:id="rId11"/>
+    <p:sldId id="266" r:id="rId12"/>
+    <p:sldId id="267" r:id="rId13"/>
+    <p:sldId id="268" r:id="rId14"/>
+    <p:sldId id="269" r:id="rId15"/>
+    <p:sldId id="270" r:id="rId16"/>
+    <p:sldId id="271" r:id="rId17"/>
+    <p:sldId id="272" r:id="rId18"/>
+    <p:sldId id="273" r:id="rId19"/>
+    <p:sldId id="274" r:id="rId20"/>
   </p:sldIdLst>
   <p:sldSz cx="12192000" cy="6858000"/>
   <p:notesSz cx="6858000" cy="9144000"/>
@@ -107,6 +122,11 @@
       </a:defRPr>
     </a:lvl9pPr>
   </p:defaultTextStyle>
+  <p:extLst>
+    <p:ext uri="{EFAFB233-063F-42B5-8137-9DF3F51BA10A}">
+      <p15:sldGuideLst xmlns:p15="http://schemas.microsoft.com/office/powerpoint/2012/main"/>
+    </p:ext>
+  </p:extLst>
 </p:presentation>
 </file>
 
@@ -257,7 +277,7 @@
           <a:p>
             <a:fld id="{64CF7CC1-1E03-4F3A-AB27-DC309FA82821}" type="datetimeFigureOut">
               <a:rPr lang="fr-FR" smtClean="0"/>
-              <a:t>02/07/2026</a:t>
+              <a:t>03/07/2026</a:t>
             </a:fld>
             <a:endParaRPr lang="fr-FR"/>
           </a:p>
@@ -455,7 +475,7 @@
           <a:p>
             <a:fld id="{64CF7CC1-1E03-4F3A-AB27-DC309FA82821}" type="datetimeFigureOut">
               <a:rPr lang="fr-FR" smtClean="0"/>
-              <a:t>02/07/2026</a:t>
+              <a:t>03/07/2026</a:t>
             </a:fld>
             <a:endParaRPr lang="fr-FR"/>
           </a:p>
@@ -663,7 +683,7 @@
           <a:p>
             <a:fld id="{64CF7CC1-1E03-4F3A-AB27-DC309FA82821}" type="datetimeFigureOut">
               <a:rPr lang="fr-FR" smtClean="0"/>
-              <a:t>02/07/2026</a:t>
+              <a:t>03/07/2026</a:t>
             </a:fld>
             <a:endParaRPr lang="fr-FR"/>
           </a:p>
@@ -861,7 +881,7 @@
           <a:p>
             <a:fld id="{64CF7CC1-1E03-4F3A-AB27-DC309FA82821}" type="datetimeFigureOut">
               <a:rPr lang="fr-FR" smtClean="0"/>
-              <a:t>02/07/2026</a:t>
+              <a:t>03/07/2026</a:t>
             </a:fld>
             <a:endParaRPr lang="fr-FR"/>
           </a:p>
@@ -1136,7 +1156,7 @@
           <a:p>
             <a:fld id="{64CF7CC1-1E03-4F3A-AB27-DC309FA82821}" type="datetimeFigureOut">
               <a:rPr lang="fr-FR" smtClean="0"/>
-              <a:t>02/07/2026</a:t>
+              <a:t>03/07/2026</a:t>
             </a:fld>
             <a:endParaRPr lang="fr-FR"/>
           </a:p>
@@ -1401,7 +1421,7 @@
           <a:p>
             <a:fld id="{64CF7CC1-1E03-4F3A-AB27-DC309FA82821}" type="datetimeFigureOut">
               <a:rPr lang="fr-FR" smtClean="0"/>
-              <a:t>02/07/2026</a:t>
+              <a:t>03/07/2026</a:t>
             </a:fld>
             <a:endParaRPr lang="fr-FR"/>
           </a:p>
@@ -1813,7 +1833,7 @@
           <a:p>
             <a:fld id="{64CF7CC1-1E03-4F3A-AB27-DC309FA82821}" type="datetimeFigureOut">
               <a:rPr lang="fr-FR" smtClean="0"/>
-              <a:t>02/07/2026</a:t>
+              <a:t>03/07/2026</a:t>
             </a:fld>
             <a:endParaRPr lang="fr-FR"/>
           </a:p>
@@ -1954,7 +1974,7 @@
           <a:p>
             <a:fld id="{64CF7CC1-1E03-4F3A-AB27-DC309FA82821}" type="datetimeFigureOut">
               <a:rPr lang="fr-FR" smtClean="0"/>
-              <a:t>02/07/2026</a:t>
+              <a:t>03/07/2026</a:t>
             </a:fld>
             <a:endParaRPr lang="fr-FR"/>
           </a:p>
@@ -2067,7 +2087,7 @@
           <a:p>
             <a:fld id="{64CF7CC1-1E03-4F3A-AB27-DC309FA82821}" type="datetimeFigureOut">
               <a:rPr lang="fr-FR" smtClean="0"/>
-              <a:t>02/07/2026</a:t>
+              <a:t>03/07/2026</a:t>
             </a:fld>
             <a:endParaRPr lang="fr-FR"/>
           </a:p>
@@ -2378,7 +2398,7 @@
           <a:p>
             <a:fld id="{64CF7CC1-1E03-4F3A-AB27-DC309FA82821}" type="datetimeFigureOut">
               <a:rPr lang="fr-FR" smtClean="0"/>
-              <a:t>02/07/2026</a:t>
+              <a:t>03/07/2026</a:t>
             </a:fld>
             <a:endParaRPr lang="fr-FR"/>
           </a:p>
@@ -2666,7 +2686,7 @@
           <a:p>
             <a:fld id="{64CF7CC1-1E03-4F3A-AB27-DC309FA82821}" type="datetimeFigureOut">
               <a:rPr lang="fr-FR" smtClean="0"/>
-              <a:t>02/07/2026</a:t>
+              <a:t>03/07/2026</a:t>
             </a:fld>
             <a:endParaRPr lang="fr-FR"/>
           </a:p>
@@ -2907,7 +2927,7 @@
           <a:p>
             <a:fld id="{64CF7CC1-1E03-4F3A-AB27-DC309FA82821}" type="datetimeFigureOut">
               <a:rPr lang="fr-FR" smtClean="0"/>
-              <a:t>02/07/2026</a:t>
+              <a:t>03/07/2026</a:t>
             </a:fld>
             <a:endParaRPr lang="fr-FR"/>
           </a:p>
@@ -3365,6 +3385,2076 @@
 </p:sld>
 </file>
 
+<file path=ppt/slides/slide10.xml><?xml version="1.0" encoding="utf-8"?>
+<p:sld xmlns:a="http://schemas.openxmlformats.org/drawingml/2006/main" xmlns:r="http://schemas.openxmlformats.org/officeDocument/2006/relationships" xmlns:p="http://schemas.openxmlformats.org/presentationml/2006/main">
+  <p:cSld>
+    <p:spTree>
+      <p:nvGrpSpPr>
+        <p:cNvPr id="1" name=""/>
+        <p:cNvGrpSpPr/>
+        <p:nvPr/>
+      </p:nvGrpSpPr>
+      <p:grpSpPr>
+        <a:xfrm>
+          <a:off x="0" y="0"/>
+          <a:ext cx="0" cy="0"/>
+          <a:chOff x="0" y="0"/>
+          <a:chExt cx="0" cy="0"/>
+        </a:xfrm>
+      </p:grpSpPr>
+      <p:pic>
+        <p:nvPicPr>
+          <p:cNvPr id="10" name="Image 9">
+            <a:extLst>
+              <a:ext uri="{FF2B5EF4-FFF2-40B4-BE49-F238E27FC236}">
+                <a16:creationId xmlns:a16="http://schemas.microsoft.com/office/drawing/2014/main" id="{4C515769-5B3D-438F-91F8-E34514007FE8}"/>
+              </a:ext>
+            </a:extLst>
+          </p:cNvPr>
+          <p:cNvPicPr>
+            <a:picLocks noChangeAspect="1"/>
+          </p:cNvPicPr>
+          <p:nvPr/>
+        </p:nvPicPr>
+        <p:blipFill>
+          <a:blip r:embed="rId2">
+            <a:extLst>
+              <a:ext uri="{28A0092B-C50C-407E-A947-70E740481C1C}">
+                <a14:useLocalDpi xmlns:a14="http://schemas.microsoft.com/office/drawing/2010/main" val="0"/>
+              </a:ext>
+            </a:extLst>
+          </a:blip>
+          <a:srcRect/>
+          <a:stretch/>
+        </p:blipFill>
+        <p:spPr>
+          <a:xfrm>
+            <a:off x="2667000" y="0"/>
+            <a:ext cx="6858000" cy="6858000"/>
+          </a:xfrm>
+          <a:prstGeom prst="rect">
+            <a:avLst/>
+          </a:prstGeom>
+        </p:spPr>
+      </p:pic>
+      <p:sp>
+        <p:nvSpPr>
+          <p:cNvPr id="2" name="Rectangle : carré corné 1">
+            <a:extLst>
+              <a:ext uri="{FF2B5EF4-FFF2-40B4-BE49-F238E27FC236}">
+                <a16:creationId xmlns:a16="http://schemas.microsoft.com/office/drawing/2014/main" id="{BFB28677-11DA-4608-8F21-FBC0FE5957EB}"/>
+              </a:ext>
+            </a:extLst>
+          </p:cNvPr>
+          <p:cNvSpPr/>
+          <p:nvPr/>
+        </p:nvSpPr>
+        <p:spPr>
+          <a:xfrm>
+            <a:off x="209725" y="620786"/>
+            <a:ext cx="2298583" cy="4379054"/>
+          </a:xfrm>
+          <a:prstGeom prst="foldedCorner">
+            <a:avLst/>
+          </a:prstGeom>
+          <a:solidFill>
+            <a:schemeClr val="bg1">
+              <a:lumMod val="85000"/>
+            </a:schemeClr>
+          </a:solidFill>
+        </p:spPr>
+        <p:style>
+          <a:lnRef idx="2">
+            <a:schemeClr val="accent1">
+              <a:shade val="50000"/>
+            </a:schemeClr>
+          </a:lnRef>
+          <a:fillRef idx="1">
+            <a:schemeClr val="accent1"/>
+          </a:fillRef>
+          <a:effectRef idx="0">
+            <a:schemeClr val="accent1"/>
+          </a:effectRef>
+          <a:fontRef idx="minor">
+            <a:schemeClr val="lt1"/>
+          </a:fontRef>
+        </p:style>
+        <p:txBody>
+          <a:bodyPr rtlCol="0" anchor="ctr"/>
+          <a:lstStyle/>
+          <a:p>
+            <a:pPr algn="ctr"/>
+            <a:endParaRPr lang="fr-FR"/>
+          </a:p>
+        </p:txBody>
+      </p:sp>
+      <p:sp>
+        <p:nvSpPr>
+          <p:cNvPr id="3" name="ZoneTexte 2">
+            <a:extLst>
+              <a:ext uri="{FF2B5EF4-FFF2-40B4-BE49-F238E27FC236}">
+                <a16:creationId xmlns:a16="http://schemas.microsoft.com/office/drawing/2014/main" id="{BA51F41B-C70C-48EF-90D9-550EFF142915}"/>
+              </a:ext>
+            </a:extLst>
+          </p:cNvPr>
+          <p:cNvSpPr txBox="1"/>
+          <p:nvPr/>
+        </p:nvSpPr>
+        <p:spPr>
+          <a:xfrm>
+            <a:off x="302004" y="746620"/>
+            <a:ext cx="2072080" cy="3754874"/>
+          </a:xfrm>
+          <a:prstGeom prst="rect">
+            <a:avLst/>
+          </a:prstGeom>
+          <a:noFill/>
+        </p:spPr>
+        <p:txBody>
+          <a:bodyPr wrap="square" rtlCol="0">
+            <a:spAutoFit/>
+          </a:bodyPr>
+          <a:lstStyle/>
+          <a:p>
+            <a:r>
+              <a:rPr lang="fr-FR" sz="1400" u="sng" dirty="0"/>
+              <a:t>Block AMC:</a:t>
+            </a:r>
+          </a:p>
+          <a:p>
+            <a:pPr marL="285750" indent="-285750">
+              <a:buFont typeface="Arial" panose="020B0604020202020204" pitchFamily="34" charset="0"/>
+              <a:buChar char="•"/>
+            </a:pPr>
+            <a:r>
+              <a:rPr lang="fr-FR" sz="1400" dirty="0"/>
+              <a:t>AMC ES FQ (+)</a:t>
+            </a:r>
+          </a:p>
+          <a:p>
+            <a:pPr marL="285750" indent="-285750">
+              <a:buFont typeface="Arial" panose="020B0604020202020204" pitchFamily="34" charset="0"/>
+              <a:buChar char="•"/>
+            </a:pPr>
+            <a:r>
+              <a:rPr lang="fr-FR" sz="1400" dirty="0"/>
+              <a:t>AMC ville FQ (+)</a:t>
+            </a:r>
+          </a:p>
+          <a:p>
+            <a:r>
+              <a:rPr lang="fr-FR" sz="1400" u="sng" dirty="0"/>
+              <a:t>Block </a:t>
+            </a:r>
+            <a:r>
+              <a:rPr lang="fr-FR" sz="1400" u="sng" dirty="0" err="1"/>
+              <a:t>Humans</a:t>
+            </a:r>
+            <a:r>
+              <a:rPr lang="fr-FR" sz="1400" u="sng" dirty="0"/>
+              <a:t>:</a:t>
+            </a:r>
+          </a:p>
+          <a:p>
+            <a:pPr marL="285750" indent="-285750">
+              <a:buFont typeface="Arial" panose="020B0604020202020204" pitchFamily="34" charset="0"/>
+              <a:buChar char="•"/>
+            </a:pPr>
+            <a:r>
+              <a:rPr lang="fr-FR" sz="1400" dirty="0" err="1"/>
+              <a:t>Medecins</a:t>
+            </a:r>
+            <a:r>
+              <a:rPr lang="fr-FR" sz="1400" dirty="0"/>
+              <a:t>/</a:t>
+            </a:r>
+            <a:r>
+              <a:rPr lang="fr-FR" sz="1400" dirty="0" err="1"/>
+              <a:t>hab</a:t>
+            </a:r>
+            <a:r>
+              <a:rPr lang="fr-FR" sz="1400" dirty="0"/>
+              <a:t> (+)</a:t>
+            </a:r>
+          </a:p>
+          <a:p>
+            <a:pPr marL="285750" indent="-285750">
+              <a:buFont typeface="Arial" panose="020B0604020202020204" pitchFamily="34" charset="0"/>
+              <a:buChar char="•"/>
+            </a:pPr>
+            <a:r>
+              <a:rPr lang="fr-FR" sz="1400" dirty="0"/>
+              <a:t>Pop 75 plus (-)</a:t>
+            </a:r>
+          </a:p>
+          <a:p>
+            <a:pPr marL="285750" indent="-285750">
+              <a:buFont typeface="Arial" panose="020B0604020202020204" pitchFamily="34" charset="0"/>
+              <a:buChar char="•"/>
+            </a:pPr>
+            <a:r>
+              <a:rPr lang="fr-FR" sz="1400" dirty="0"/>
+              <a:t>EQI (+)</a:t>
+            </a:r>
+          </a:p>
+          <a:p>
+            <a:r>
+              <a:rPr lang="fr-FR" sz="1400" u="sng" dirty="0"/>
+              <a:t>Block </a:t>
+            </a:r>
+            <a:r>
+              <a:rPr lang="fr-FR" sz="1400" u="sng" dirty="0" err="1"/>
+              <a:t>Environment</a:t>
+            </a:r>
+            <a:r>
+              <a:rPr lang="fr-FR" sz="1400" u="sng" dirty="0"/>
+              <a:t>:</a:t>
+            </a:r>
+          </a:p>
+          <a:p>
+            <a:pPr marL="285750" indent="-285750">
+              <a:buFont typeface="Arial" panose="020B0604020202020204" pitchFamily="34" charset="0"/>
+              <a:buChar char="•"/>
+            </a:pPr>
+            <a:r>
+              <a:rPr lang="fr-FR" sz="1400" dirty="0"/>
+              <a:t>Air PM25 (+)</a:t>
+            </a:r>
+          </a:p>
+          <a:p>
+            <a:pPr marL="285750" indent="-285750">
+              <a:buFont typeface="Arial" panose="020B0604020202020204" pitchFamily="34" charset="0"/>
+              <a:buChar char="•"/>
+            </a:pPr>
+            <a:r>
+              <a:rPr lang="fr-FR" sz="1400" dirty="0"/>
+              <a:t>DJU froid (+)</a:t>
+            </a:r>
+          </a:p>
+          <a:p>
+            <a:r>
+              <a:rPr lang="fr-FR" sz="1400" u="sng" dirty="0"/>
+              <a:t>Block Animals:</a:t>
+            </a:r>
+          </a:p>
+          <a:p>
+            <a:pPr marL="285750" indent="-285750">
+              <a:buFont typeface="Arial" panose="020B0604020202020204" pitchFamily="34" charset="0"/>
+              <a:buChar char="•"/>
+            </a:pPr>
+            <a:r>
+              <a:rPr lang="fr-FR" sz="1400" dirty="0"/>
+              <a:t>AMR animaux de compagnie C3G (-)</a:t>
+            </a:r>
+          </a:p>
+          <a:p>
+            <a:pPr marL="285750" indent="-285750">
+              <a:buFont typeface="Arial" panose="020B0604020202020204" pitchFamily="34" charset="0"/>
+              <a:buChar char="•"/>
+            </a:pPr>
+            <a:r>
+              <a:rPr lang="fr-FR" sz="1400" dirty="0"/>
+              <a:t>Densité animaux de production (+)</a:t>
+            </a:r>
+          </a:p>
+          <a:p>
+            <a:pPr marL="285750" indent="-285750">
+              <a:buFont typeface="Arial" panose="020B0604020202020204" pitchFamily="34" charset="0"/>
+              <a:buChar char="•"/>
+            </a:pPr>
+            <a:r>
+              <a:rPr lang="fr-FR" sz="1400" dirty="0"/>
+              <a:t>Taux de possession de chats (+)</a:t>
+            </a:r>
+          </a:p>
+        </p:txBody>
+      </p:sp>
+    </p:spTree>
+    <p:extLst>
+      <p:ext uri="{BB962C8B-B14F-4D97-AF65-F5344CB8AC3E}">
+        <p14:creationId xmlns:p14="http://schemas.microsoft.com/office/powerpoint/2010/main" val="3861332918"/>
+      </p:ext>
+    </p:extLst>
+  </p:cSld>
+  <p:clrMapOvr>
+    <a:masterClrMapping/>
+  </p:clrMapOvr>
+</p:sld>
+</file>
+
+<file path=ppt/slides/slide11.xml><?xml version="1.0" encoding="utf-8"?>
+<p:sld xmlns:a="http://schemas.openxmlformats.org/drawingml/2006/main" xmlns:r="http://schemas.openxmlformats.org/officeDocument/2006/relationships" xmlns:p="http://schemas.openxmlformats.org/presentationml/2006/main">
+  <p:cSld>
+    <p:spTree>
+      <p:nvGrpSpPr>
+        <p:cNvPr id="1" name=""/>
+        <p:cNvGrpSpPr/>
+        <p:nvPr/>
+      </p:nvGrpSpPr>
+      <p:grpSpPr>
+        <a:xfrm>
+          <a:off x="0" y="0"/>
+          <a:ext cx="0" cy="0"/>
+          <a:chOff x="0" y="0"/>
+          <a:chExt cx="0" cy="0"/>
+        </a:xfrm>
+      </p:grpSpPr>
+      <p:sp>
+        <p:nvSpPr>
+          <p:cNvPr id="2" name="Titre 1">
+            <a:extLst>
+              <a:ext uri="{FF2B5EF4-FFF2-40B4-BE49-F238E27FC236}">
+                <a16:creationId xmlns:a16="http://schemas.microsoft.com/office/drawing/2014/main" id="{DBAE983D-80F2-4D13-9354-EA2BA22BB7B3}"/>
+              </a:ext>
+            </a:extLst>
+          </p:cNvPr>
+          <p:cNvSpPr>
+            <a:spLocks noGrp="1"/>
+          </p:cNvSpPr>
+          <p:nvPr>
+            <p:ph type="ctrTitle"/>
+          </p:nvPr>
+        </p:nvSpPr>
+        <p:spPr/>
+        <p:txBody>
+          <a:bodyPr/>
+          <a:lstStyle/>
+          <a:p>
+            <a:r>
+              <a:rPr lang="fr-FR" dirty="0"/>
+              <a:t>AMR EHPAD C3G</a:t>
+            </a:r>
+          </a:p>
+        </p:txBody>
+      </p:sp>
+    </p:spTree>
+    <p:extLst>
+      <p:ext uri="{BB962C8B-B14F-4D97-AF65-F5344CB8AC3E}">
+        <p14:creationId xmlns:p14="http://schemas.microsoft.com/office/powerpoint/2010/main" val="1610525028"/>
+      </p:ext>
+    </p:extLst>
+  </p:cSld>
+  <p:clrMapOvr>
+    <a:masterClrMapping/>
+  </p:clrMapOvr>
+</p:sld>
+</file>
+
+<file path=ppt/slides/slide12.xml><?xml version="1.0" encoding="utf-8"?>
+<p:sld xmlns:a="http://schemas.openxmlformats.org/drawingml/2006/main" xmlns:r="http://schemas.openxmlformats.org/officeDocument/2006/relationships" xmlns:p="http://schemas.openxmlformats.org/presentationml/2006/main">
+  <p:cSld>
+    <p:spTree>
+      <p:nvGrpSpPr>
+        <p:cNvPr id="1" name=""/>
+        <p:cNvGrpSpPr/>
+        <p:nvPr/>
+      </p:nvGrpSpPr>
+      <p:grpSpPr>
+        <a:xfrm>
+          <a:off x="0" y="0"/>
+          <a:ext cx="0" cy="0"/>
+          <a:chOff x="0" y="0"/>
+          <a:chExt cx="0" cy="0"/>
+        </a:xfrm>
+      </p:grpSpPr>
+      <p:sp>
+        <p:nvSpPr>
+          <p:cNvPr id="2" name="Titre 1">
+            <a:extLst>
+              <a:ext uri="{FF2B5EF4-FFF2-40B4-BE49-F238E27FC236}">
+                <a16:creationId xmlns:a16="http://schemas.microsoft.com/office/drawing/2014/main" id="{89530B02-42EB-42A6-98A3-D028D7F62B7A}"/>
+              </a:ext>
+            </a:extLst>
+          </p:cNvPr>
+          <p:cNvSpPr>
+            <a:spLocks noGrp="1"/>
+          </p:cNvSpPr>
+          <p:nvPr>
+            <p:ph type="title"/>
+          </p:nvPr>
+        </p:nvSpPr>
+        <p:spPr>
+          <a:xfrm>
+            <a:off x="418035" y="289826"/>
+            <a:ext cx="10515600" cy="750611"/>
+          </a:xfrm>
+        </p:spPr>
+        <p:txBody>
+          <a:bodyPr/>
+          <a:lstStyle/>
+          <a:p>
+            <a:r>
+              <a:rPr lang="fr-FR" dirty="0"/>
+              <a:t>Graphe du modèle</a:t>
+            </a:r>
+          </a:p>
+        </p:txBody>
+      </p:sp>
+      <p:grpSp>
+        <p:nvGrpSpPr>
+          <p:cNvPr id="8" name="Groupe 7">
+            <a:extLst>
+              <a:ext uri="{FF2B5EF4-FFF2-40B4-BE49-F238E27FC236}">
+                <a16:creationId xmlns:a16="http://schemas.microsoft.com/office/drawing/2014/main" id="{6D79E95E-0AD4-4D8C-BEA1-1160FAFC3588}"/>
+              </a:ext>
+            </a:extLst>
+          </p:cNvPr>
+          <p:cNvGrpSpPr/>
+          <p:nvPr/>
+        </p:nvGrpSpPr>
+        <p:grpSpPr>
+          <a:xfrm>
+            <a:off x="8787467" y="2374489"/>
+            <a:ext cx="2877424" cy="1686188"/>
+            <a:chOff x="8737133" y="1502034"/>
+            <a:chExt cx="2877424" cy="1686188"/>
+          </a:xfrm>
+        </p:grpSpPr>
+        <p:sp>
+          <p:nvSpPr>
+            <p:cNvPr id="6" name="Rectangle : carré corné 5">
+              <a:extLst>
+                <a:ext uri="{FF2B5EF4-FFF2-40B4-BE49-F238E27FC236}">
+                  <a16:creationId xmlns:a16="http://schemas.microsoft.com/office/drawing/2014/main" id="{AB167A05-8477-4AF9-BA6C-1482FCA752F1}"/>
+                </a:ext>
+              </a:extLst>
+            </p:cNvPr>
+            <p:cNvSpPr/>
+            <p:nvPr/>
+          </p:nvSpPr>
+          <p:spPr>
+            <a:xfrm>
+              <a:off x="8737133" y="1502034"/>
+              <a:ext cx="2877424" cy="1686188"/>
+            </a:xfrm>
+            <a:prstGeom prst="foldedCorner">
+              <a:avLst/>
+            </a:prstGeom>
+            <a:solidFill>
+              <a:schemeClr val="bg2"/>
+            </a:solidFill>
+          </p:spPr>
+          <p:style>
+            <a:lnRef idx="2">
+              <a:schemeClr val="accent1">
+                <a:shade val="50000"/>
+              </a:schemeClr>
+            </a:lnRef>
+            <a:fillRef idx="1">
+              <a:schemeClr val="accent1"/>
+            </a:fillRef>
+            <a:effectRef idx="0">
+              <a:schemeClr val="accent1"/>
+            </a:effectRef>
+            <a:fontRef idx="minor">
+              <a:schemeClr val="lt1"/>
+            </a:fontRef>
+          </p:style>
+          <p:txBody>
+            <a:bodyPr rtlCol="0" anchor="ctr"/>
+            <a:lstStyle/>
+            <a:p>
+              <a:pPr algn="ctr"/>
+              <a:endParaRPr lang="fr-FR"/>
+            </a:p>
+          </p:txBody>
+        </p:sp>
+        <p:sp>
+          <p:nvSpPr>
+            <p:cNvPr id="7" name="ZoneTexte 6">
+              <a:extLst>
+                <a:ext uri="{FF2B5EF4-FFF2-40B4-BE49-F238E27FC236}">
+                  <a16:creationId xmlns:a16="http://schemas.microsoft.com/office/drawing/2014/main" id="{4862162D-BEE4-4B1F-B905-D2F0635B5F2A}"/>
+                </a:ext>
+              </a:extLst>
+            </p:cNvPr>
+            <p:cNvSpPr txBox="1"/>
+            <p:nvPr/>
+          </p:nvSpPr>
+          <p:spPr>
+            <a:xfrm>
+              <a:off x="8883941" y="1652631"/>
+              <a:ext cx="2583809" cy="1384995"/>
+            </a:xfrm>
+            <a:prstGeom prst="rect">
+              <a:avLst/>
+            </a:prstGeom>
+            <a:noFill/>
+          </p:spPr>
+          <p:txBody>
+            <a:bodyPr wrap="square" rtlCol="0">
+              <a:spAutoFit/>
+            </a:bodyPr>
+            <a:lstStyle/>
+            <a:p>
+              <a:pPr marL="171450" indent="-171450">
+                <a:buFont typeface="Arial" panose="020B0604020202020204" pitchFamily="34" charset="0"/>
+                <a:buChar char="•"/>
+              </a:pPr>
+              <a:r>
+                <a:rPr lang="fr-FR" sz="1200" dirty="0"/>
+                <a:t>AFIT (variance globale du modèle corrigé par le nb de paramètres à estimer) : 0.45</a:t>
+              </a:r>
+            </a:p>
+            <a:p>
+              <a:pPr marL="171450" indent="-171450">
+                <a:buFont typeface="Arial" panose="020B0604020202020204" pitchFamily="34" charset="0"/>
+                <a:buChar char="•"/>
+              </a:pPr>
+              <a:r>
+                <a:rPr lang="fr-FR" sz="1200" dirty="0"/>
+                <a:t>FIT_M (variance du modèle entre VL et VO): 0.54</a:t>
+              </a:r>
+            </a:p>
+            <a:p>
+              <a:pPr marL="171450" indent="-171450">
+                <a:buFont typeface="Arial" panose="020B0604020202020204" pitchFamily="34" charset="0"/>
+                <a:buChar char="•"/>
+              </a:pPr>
+              <a:r>
+                <a:rPr lang="fr-FR" sz="1200" dirty="0"/>
+                <a:t>FIT_S (variance du modèle des liens entre VL): 0.68</a:t>
+              </a:r>
+            </a:p>
+          </p:txBody>
+        </p:sp>
+      </p:grpSp>
+      <p:pic>
+        <p:nvPicPr>
+          <p:cNvPr id="2050" name="Picture 2">
+            <a:extLst>
+              <a:ext uri="{FF2B5EF4-FFF2-40B4-BE49-F238E27FC236}">
+                <a16:creationId xmlns:a16="http://schemas.microsoft.com/office/drawing/2014/main" id="{F0AEED13-B723-4F24-B1E6-1DCD16ED2E0C}"/>
+              </a:ext>
+            </a:extLst>
+          </p:cNvPr>
+          <p:cNvPicPr>
+            <a:picLocks noChangeAspect="1" noChangeArrowheads="1"/>
+          </p:cNvPicPr>
+          <p:nvPr/>
+        </p:nvPicPr>
+        <p:blipFill>
+          <a:blip r:embed="rId2">
+            <a:extLst>
+              <a:ext uri="{28A0092B-C50C-407E-A947-70E740481C1C}">
+                <a14:useLocalDpi xmlns:a14="http://schemas.microsoft.com/office/drawing/2010/main" val="0"/>
+              </a:ext>
+            </a:extLst>
+          </a:blip>
+          <a:srcRect/>
+          <a:stretch>
+            <a:fillRect/>
+          </a:stretch>
+        </p:blipFill>
+        <p:spPr bwMode="auto">
+          <a:xfrm>
+            <a:off x="0" y="1040437"/>
+            <a:ext cx="7974782" cy="5696273"/>
+          </a:xfrm>
+          <a:prstGeom prst="rect">
+            <a:avLst/>
+          </a:prstGeom>
+          <a:noFill/>
+          <a:extLst>
+            <a:ext uri="{909E8E84-426E-40DD-AFC4-6F175D3DCCD1}">
+              <a14:hiddenFill xmlns:a14="http://schemas.microsoft.com/office/drawing/2010/main">
+                <a:solidFill>
+                  <a:srgbClr val="FFFFFF"/>
+                </a:solidFill>
+              </a14:hiddenFill>
+            </a:ext>
+          </a:extLst>
+        </p:spPr>
+      </p:pic>
+    </p:spTree>
+    <p:extLst>
+      <p:ext uri="{BB962C8B-B14F-4D97-AF65-F5344CB8AC3E}">
+        <p14:creationId xmlns:p14="http://schemas.microsoft.com/office/powerpoint/2010/main" val="370691165"/>
+      </p:ext>
+    </p:extLst>
+  </p:cSld>
+  <p:clrMapOvr>
+    <a:masterClrMapping/>
+  </p:clrMapOvr>
+</p:sld>
+</file>
+
+<file path=ppt/slides/slide13.xml><?xml version="1.0" encoding="utf-8"?>
+<p:sld xmlns:a="http://schemas.openxmlformats.org/drawingml/2006/main" xmlns:r="http://schemas.openxmlformats.org/officeDocument/2006/relationships" xmlns:p="http://schemas.openxmlformats.org/presentationml/2006/main">
+  <p:cSld>
+    <p:spTree>
+      <p:nvGrpSpPr>
+        <p:cNvPr id="1" name=""/>
+        <p:cNvGrpSpPr/>
+        <p:nvPr/>
+      </p:nvGrpSpPr>
+      <p:grpSpPr>
+        <a:xfrm>
+          <a:off x="0" y="0"/>
+          <a:ext cx="0" cy="0"/>
+          <a:chOff x="0" y="0"/>
+          <a:chExt cx="0" cy="0"/>
+        </a:xfrm>
+      </p:grpSpPr>
+      <p:pic>
+        <p:nvPicPr>
+          <p:cNvPr id="10" name="Image 9">
+            <a:extLst>
+              <a:ext uri="{FF2B5EF4-FFF2-40B4-BE49-F238E27FC236}">
+                <a16:creationId xmlns:a16="http://schemas.microsoft.com/office/drawing/2014/main" id="{4C515769-5B3D-438F-91F8-E34514007FE8}"/>
+              </a:ext>
+            </a:extLst>
+          </p:cNvPr>
+          <p:cNvPicPr>
+            <a:picLocks noChangeAspect="1"/>
+          </p:cNvPicPr>
+          <p:nvPr/>
+        </p:nvPicPr>
+        <p:blipFill>
+          <a:blip r:embed="rId2">
+            <a:extLst>
+              <a:ext uri="{28A0092B-C50C-407E-A947-70E740481C1C}">
+                <a14:useLocalDpi xmlns:a14="http://schemas.microsoft.com/office/drawing/2010/main" val="0"/>
+              </a:ext>
+            </a:extLst>
+          </a:blip>
+          <a:srcRect/>
+          <a:stretch/>
+        </p:blipFill>
+        <p:spPr>
+          <a:xfrm>
+            <a:off x="2667000" y="0"/>
+            <a:ext cx="6858000" cy="6858000"/>
+          </a:xfrm>
+          <a:prstGeom prst="rect">
+            <a:avLst/>
+          </a:prstGeom>
+        </p:spPr>
+      </p:pic>
+      <p:sp>
+        <p:nvSpPr>
+          <p:cNvPr id="2" name="Rectangle : carré corné 1">
+            <a:extLst>
+              <a:ext uri="{FF2B5EF4-FFF2-40B4-BE49-F238E27FC236}">
+                <a16:creationId xmlns:a16="http://schemas.microsoft.com/office/drawing/2014/main" id="{BFB28677-11DA-4608-8F21-FBC0FE5957EB}"/>
+              </a:ext>
+            </a:extLst>
+          </p:cNvPr>
+          <p:cNvSpPr/>
+          <p:nvPr/>
+        </p:nvSpPr>
+        <p:spPr>
+          <a:xfrm>
+            <a:off x="209725" y="620786"/>
+            <a:ext cx="2298583" cy="4379054"/>
+          </a:xfrm>
+          <a:prstGeom prst="foldedCorner">
+            <a:avLst/>
+          </a:prstGeom>
+          <a:solidFill>
+            <a:schemeClr val="bg1">
+              <a:lumMod val="85000"/>
+            </a:schemeClr>
+          </a:solidFill>
+        </p:spPr>
+        <p:style>
+          <a:lnRef idx="2">
+            <a:schemeClr val="accent1">
+              <a:shade val="50000"/>
+            </a:schemeClr>
+          </a:lnRef>
+          <a:fillRef idx="1">
+            <a:schemeClr val="accent1"/>
+          </a:fillRef>
+          <a:effectRef idx="0">
+            <a:schemeClr val="accent1"/>
+          </a:effectRef>
+          <a:fontRef idx="minor">
+            <a:schemeClr val="lt1"/>
+          </a:fontRef>
+        </p:style>
+        <p:txBody>
+          <a:bodyPr rtlCol="0" anchor="ctr"/>
+          <a:lstStyle/>
+          <a:p>
+            <a:pPr algn="ctr"/>
+            <a:endParaRPr lang="fr-FR"/>
+          </a:p>
+        </p:txBody>
+      </p:sp>
+      <p:sp>
+        <p:nvSpPr>
+          <p:cNvPr id="3" name="ZoneTexte 2">
+            <a:extLst>
+              <a:ext uri="{FF2B5EF4-FFF2-40B4-BE49-F238E27FC236}">
+                <a16:creationId xmlns:a16="http://schemas.microsoft.com/office/drawing/2014/main" id="{BA51F41B-C70C-48EF-90D9-550EFF142915}"/>
+              </a:ext>
+            </a:extLst>
+          </p:cNvPr>
+          <p:cNvSpPr txBox="1"/>
+          <p:nvPr/>
+        </p:nvSpPr>
+        <p:spPr>
+          <a:xfrm>
+            <a:off x="302004" y="746620"/>
+            <a:ext cx="2072080" cy="3970318"/>
+          </a:xfrm>
+          <a:prstGeom prst="rect">
+            <a:avLst/>
+          </a:prstGeom>
+          <a:noFill/>
+        </p:spPr>
+        <p:txBody>
+          <a:bodyPr wrap="square" rtlCol="0">
+            <a:spAutoFit/>
+          </a:bodyPr>
+          <a:lstStyle/>
+          <a:p>
+            <a:r>
+              <a:rPr lang="fr-FR" sz="1400" u="sng" dirty="0"/>
+              <a:t>Block AMC:</a:t>
+            </a:r>
+          </a:p>
+          <a:p>
+            <a:pPr marL="285750" indent="-285750">
+              <a:buFont typeface="Arial" panose="020B0604020202020204" pitchFamily="34" charset="0"/>
+              <a:buChar char="•"/>
+            </a:pPr>
+            <a:r>
+              <a:rPr lang="fr-FR" sz="1400" dirty="0"/>
+              <a:t>AMC EHPAD C3G (+)</a:t>
+            </a:r>
+          </a:p>
+          <a:p>
+            <a:pPr marL="285750" indent="-285750">
+              <a:buFont typeface="Arial" panose="020B0604020202020204" pitchFamily="34" charset="0"/>
+              <a:buChar char="•"/>
+            </a:pPr>
+            <a:r>
+              <a:rPr lang="fr-FR" sz="1400" dirty="0"/>
+              <a:t>AMC ville totale (+)</a:t>
+            </a:r>
+          </a:p>
+          <a:p>
+            <a:r>
+              <a:rPr lang="fr-FR" sz="1400" u="sng" dirty="0"/>
+              <a:t>Block </a:t>
+            </a:r>
+            <a:r>
+              <a:rPr lang="fr-FR" sz="1400" u="sng" dirty="0" err="1"/>
+              <a:t>Humans</a:t>
+            </a:r>
+            <a:r>
+              <a:rPr lang="fr-FR" sz="1400" u="sng" dirty="0"/>
+              <a:t>:</a:t>
+            </a:r>
+          </a:p>
+          <a:p>
+            <a:pPr marL="285750" indent="-285750">
+              <a:buFont typeface="Arial" panose="020B0604020202020204" pitchFamily="34" charset="0"/>
+              <a:buChar char="•"/>
+            </a:pPr>
+            <a:r>
+              <a:rPr lang="fr-FR" sz="1400" dirty="0" err="1"/>
+              <a:t>Medecins</a:t>
+            </a:r>
+            <a:r>
+              <a:rPr lang="fr-FR" sz="1400" dirty="0"/>
+              <a:t>/</a:t>
+            </a:r>
+            <a:r>
+              <a:rPr lang="fr-FR" sz="1400" dirty="0" err="1"/>
+              <a:t>hab</a:t>
+            </a:r>
+            <a:r>
+              <a:rPr lang="fr-FR" sz="1400" dirty="0"/>
+              <a:t> (+)</a:t>
+            </a:r>
+          </a:p>
+          <a:p>
+            <a:pPr marL="285750" indent="-285750">
+              <a:buFont typeface="Arial" panose="020B0604020202020204" pitchFamily="34" charset="0"/>
+              <a:buChar char="•"/>
+            </a:pPr>
+            <a:r>
+              <a:rPr lang="fr-FR" sz="1400" dirty="0"/>
+              <a:t>Pop 75 plus (-)</a:t>
+            </a:r>
+          </a:p>
+          <a:p>
+            <a:r>
+              <a:rPr lang="fr-FR" sz="1400" u="sng" dirty="0"/>
+              <a:t>Block </a:t>
+            </a:r>
+            <a:r>
+              <a:rPr lang="fr-FR" sz="1400" u="sng" dirty="0" err="1"/>
+              <a:t>Environment</a:t>
+            </a:r>
+            <a:r>
+              <a:rPr lang="fr-FR" sz="1400" u="sng" dirty="0"/>
+              <a:t>:</a:t>
+            </a:r>
+          </a:p>
+          <a:p>
+            <a:pPr marL="285750" indent="-285750">
+              <a:buFont typeface="Arial" panose="020B0604020202020204" pitchFamily="34" charset="0"/>
+              <a:buChar char="•"/>
+            </a:pPr>
+            <a:r>
+              <a:rPr lang="fr-FR" sz="1400" dirty="0"/>
+              <a:t>Air PM25 (+)</a:t>
+            </a:r>
+          </a:p>
+          <a:p>
+            <a:pPr marL="285750" indent="-285750">
+              <a:buFont typeface="Arial" panose="020B0604020202020204" pitchFamily="34" charset="0"/>
+              <a:buChar char="•"/>
+            </a:pPr>
+            <a:r>
+              <a:rPr lang="fr-FR" sz="1400" dirty="0"/>
+              <a:t>DJU froid (+)</a:t>
+            </a:r>
+          </a:p>
+          <a:p>
+            <a:r>
+              <a:rPr lang="fr-FR" sz="1400" u="sng" dirty="0"/>
+              <a:t>Block Animals:</a:t>
+            </a:r>
+          </a:p>
+          <a:p>
+            <a:pPr marL="285750" indent="-285750">
+              <a:buFont typeface="Arial" panose="020B0604020202020204" pitchFamily="34" charset="0"/>
+              <a:buChar char="•"/>
+            </a:pPr>
+            <a:r>
+              <a:rPr lang="fr-FR" sz="1400" dirty="0"/>
+              <a:t>AMR animaux de production C3G (+)</a:t>
+            </a:r>
+          </a:p>
+          <a:p>
+            <a:pPr marL="285750" indent="-285750">
+              <a:buFont typeface="Arial" panose="020B0604020202020204" pitchFamily="34" charset="0"/>
+              <a:buChar char="•"/>
+            </a:pPr>
+            <a:r>
+              <a:rPr lang="fr-FR" sz="1400" dirty="0"/>
+              <a:t>Densité animaux de production (+)</a:t>
+            </a:r>
+          </a:p>
+          <a:p>
+            <a:pPr marL="285750" indent="-285750">
+              <a:buFont typeface="Arial" panose="020B0604020202020204" pitchFamily="34" charset="0"/>
+              <a:buChar char="•"/>
+            </a:pPr>
+            <a:r>
+              <a:rPr lang="fr-FR" sz="1400" dirty="0"/>
+              <a:t>Taux de possession de chevaux</a:t>
+            </a:r>
+          </a:p>
+          <a:p>
+            <a:pPr marL="285750" indent="-285750">
+              <a:buFont typeface="Arial" panose="020B0604020202020204" pitchFamily="34" charset="0"/>
+              <a:buChar char="•"/>
+            </a:pPr>
+            <a:r>
+              <a:rPr lang="fr-FR" sz="1400" dirty="0"/>
+              <a:t>Taux de possession de chats (+)</a:t>
+            </a:r>
+          </a:p>
+        </p:txBody>
+      </p:sp>
+    </p:spTree>
+    <p:extLst>
+      <p:ext uri="{BB962C8B-B14F-4D97-AF65-F5344CB8AC3E}">
+        <p14:creationId xmlns:p14="http://schemas.microsoft.com/office/powerpoint/2010/main" val="2853644484"/>
+      </p:ext>
+    </p:extLst>
+  </p:cSld>
+  <p:clrMapOvr>
+    <a:masterClrMapping/>
+  </p:clrMapOvr>
+</p:sld>
+</file>
+
+<file path=ppt/slides/slide14.xml><?xml version="1.0" encoding="utf-8"?>
+<p:sld xmlns:a="http://schemas.openxmlformats.org/drawingml/2006/main" xmlns:r="http://schemas.openxmlformats.org/officeDocument/2006/relationships" xmlns:p="http://schemas.openxmlformats.org/presentationml/2006/main">
+  <p:cSld>
+    <p:spTree>
+      <p:nvGrpSpPr>
+        <p:cNvPr id="1" name=""/>
+        <p:cNvGrpSpPr/>
+        <p:nvPr/>
+      </p:nvGrpSpPr>
+      <p:grpSpPr>
+        <a:xfrm>
+          <a:off x="0" y="0"/>
+          <a:ext cx="0" cy="0"/>
+          <a:chOff x="0" y="0"/>
+          <a:chExt cx="0" cy="0"/>
+        </a:xfrm>
+      </p:grpSpPr>
+      <p:sp>
+        <p:nvSpPr>
+          <p:cNvPr id="2" name="Titre 1">
+            <a:extLst>
+              <a:ext uri="{FF2B5EF4-FFF2-40B4-BE49-F238E27FC236}">
+                <a16:creationId xmlns:a16="http://schemas.microsoft.com/office/drawing/2014/main" id="{DBAE983D-80F2-4D13-9354-EA2BA22BB7B3}"/>
+              </a:ext>
+            </a:extLst>
+          </p:cNvPr>
+          <p:cNvSpPr>
+            <a:spLocks noGrp="1"/>
+          </p:cNvSpPr>
+          <p:nvPr>
+            <p:ph type="ctrTitle"/>
+          </p:nvPr>
+        </p:nvSpPr>
+        <p:spPr/>
+        <p:txBody>
+          <a:bodyPr/>
+          <a:lstStyle/>
+          <a:p>
+            <a:r>
+              <a:rPr lang="fr-FR" dirty="0"/>
+              <a:t>AMR ES C3G</a:t>
+            </a:r>
+          </a:p>
+        </p:txBody>
+      </p:sp>
+    </p:spTree>
+    <p:extLst>
+      <p:ext uri="{BB962C8B-B14F-4D97-AF65-F5344CB8AC3E}">
+        <p14:creationId xmlns:p14="http://schemas.microsoft.com/office/powerpoint/2010/main" val="663921006"/>
+      </p:ext>
+    </p:extLst>
+  </p:cSld>
+  <p:clrMapOvr>
+    <a:masterClrMapping/>
+  </p:clrMapOvr>
+</p:sld>
+</file>
+
+<file path=ppt/slides/slide15.xml><?xml version="1.0" encoding="utf-8"?>
+<p:sld xmlns:a="http://schemas.openxmlformats.org/drawingml/2006/main" xmlns:r="http://schemas.openxmlformats.org/officeDocument/2006/relationships" xmlns:p="http://schemas.openxmlformats.org/presentationml/2006/main">
+  <p:cSld>
+    <p:spTree>
+      <p:nvGrpSpPr>
+        <p:cNvPr id="1" name=""/>
+        <p:cNvGrpSpPr/>
+        <p:nvPr/>
+      </p:nvGrpSpPr>
+      <p:grpSpPr>
+        <a:xfrm>
+          <a:off x="0" y="0"/>
+          <a:ext cx="0" cy="0"/>
+          <a:chOff x="0" y="0"/>
+          <a:chExt cx="0" cy="0"/>
+        </a:xfrm>
+      </p:grpSpPr>
+      <p:sp>
+        <p:nvSpPr>
+          <p:cNvPr id="2" name="Titre 1">
+            <a:extLst>
+              <a:ext uri="{FF2B5EF4-FFF2-40B4-BE49-F238E27FC236}">
+                <a16:creationId xmlns:a16="http://schemas.microsoft.com/office/drawing/2014/main" id="{89530B02-42EB-42A6-98A3-D028D7F62B7A}"/>
+              </a:ext>
+            </a:extLst>
+          </p:cNvPr>
+          <p:cNvSpPr>
+            <a:spLocks noGrp="1"/>
+          </p:cNvSpPr>
+          <p:nvPr>
+            <p:ph type="title"/>
+          </p:nvPr>
+        </p:nvSpPr>
+        <p:spPr>
+          <a:xfrm>
+            <a:off x="418035" y="289826"/>
+            <a:ext cx="10515600" cy="750611"/>
+          </a:xfrm>
+        </p:spPr>
+        <p:txBody>
+          <a:bodyPr/>
+          <a:lstStyle/>
+          <a:p>
+            <a:r>
+              <a:rPr lang="fr-FR" dirty="0"/>
+              <a:t>Graphe du modèle</a:t>
+            </a:r>
+          </a:p>
+        </p:txBody>
+      </p:sp>
+      <p:grpSp>
+        <p:nvGrpSpPr>
+          <p:cNvPr id="8" name="Groupe 7">
+            <a:extLst>
+              <a:ext uri="{FF2B5EF4-FFF2-40B4-BE49-F238E27FC236}">
+                <a16:creationId xmlns:a16="http://schemas.microsoft.com/office/drawing/2014/main" id="{6D79E95E-0AD4-4D8C-BEA1-1160FAFC3588}"/>
+              </a:ext>
+            </a:extLst>
+          </p:cNvPr>
+          <p:cNvGrpSpPr/>
+          <p:nvPr/>
+        </p:nvGrpSpPr>
+        <p:grpSpPr>
+          <a:xfrm>
+            <a:off x="8787467" y="2374489"/>
+            <a:ext cx="2877424" cy="1686188"/>
+            <a:chOff x="8737133" y="1502034"/>
+            <a:chExt cx="2877424" cy="1686188"/>
+          </a:xfrm>
+        </p:grpSpPr>
+        <p:sp>
+          <p:nvSpPr>
+            <p:cNvPr id="6" name="Rectangle : carré corné 5">
+              <a:extLst>
+                <a:ext uri="{FF2B5EF4-FFF2-40B4-BE49-F238E27FC236}">
+                  <a16:creationId xmlns:a16="http://schemas.microsoft.com/office/drawing/2014/main" id="{AB167A05-8477-4AF9-BA6C-1482FCA752F1}"/>
+                </a:ext>
+              </a:extLst>
+            </p:cNvPr>
+            <p:cNvSpPr/>
+            <p:nvPr/>
+          </p:nvSpPr>
+          <p:spPr>
+            <a:xfrm>
+              <a:off x="8737133" y="1502034"/>
+              <a:ext cx="2877424" cy="1686188"/>
+            </a:xfrm>
+            <a:prstGeom prst="foldedCorner">
+              <a:avLst/>
+            </a:prstGeom>
+            <a:solidFill>
+              <a:schemeClr val="bg2"/>
+            </a:solidFill>
+          </p:spPr>
+          <p:style>
+            <a:lnRef idx="2">
+              <a:schemeClr val="accent1">
+                <a:shade val="50000"/>
+              </a:schemeClr>
+            </a:lnRef>
+            <a:fillRef idx="1">
+              <a:schemeClr val="accent1"/>
+            </a:fillRef>
+            <a:effectRef idx="0">
+              <a:schemeClr val="accent1"/>
+            </a:effectRef>
+            <a:fontRef idx="minor">
+              <a:schemeClr val="lt1"/>
+            </a:fontRef>
+          </p:style>
+          <p:txBody>
+            <a:bodyPr rtlCol="0" anchor="ctr"/>
+            <a:lstStyle/>
+            <a:p>
+              <a:pPr algn="ctr"/>
+              <a:endParaRPr lang="fr-FR"/>
+            </a:p>
+          </p:txBody>
+        </p:sp>
+        <p:sp>
+          <p:nvSpPr>
+            <p:cNvPr id="7" name="ZoneTexte 6">
+              <a:extLst>
+                <a:ext uri="{FF2B5EF4-FFF2-40B4-BE49-F238E27FC236}">
+                  <a16:creationId xmlns:a16="http://schemas.microsoft.com/office/drawing/2014/main" id="{4862162D-BEE4-4B1F-B905-D2F0635B5F2A}"/>
+                </a:ext>
+              </a:extLst>
+            </p:cNvPr>
+            <p:cNvSpPr txBox="1"/>
+            <p:nvPr/>
+          </p:nvSpPr>
+          <p:spPr>
+            <a:xfrm>
+              <a:off x="8883941" y="1652631"/>
+              <a:ext cx="2583809" cy="1384995"/>
+            </a:xfrm>
+            <a:prstGeom prst="rect">
+              <a:avLst/>
+            </a:prstGeom>
+            <a:noFill/>
+          </p:spPr>
+          <p:txBody>
+            <a:bodyPr wrap="square" rtlCol="0">
+              <a:spAutoFit/>
+            </a:bodyPr>
+            <a:lstStyle/>
+            <a:p>
+              <a:pPr marL="171450" indent="-171450">
+                <a:buFont typeface="Arial" panose="020B0604020202020204" pitchFamily="34" charset="0"/>
+                <a:buChar char="•"/>
+              </a:pPr>
+              <a:r>
+                <a:rPr lang="fr-FR" sz="1200" dirty="0"/>
+                <a:t>AFIT (variance globale du modèle corrigé par le nb de paramètres à estimer) : 0.52</a:t>
+              </a:r>
+            </a:p>
+            <a:p>
+              <a:pPr marL="171450" indent="-171450">
+                <a:buFont typeface="Arial" panose="020B0604020202020204" pitchFamily="34" charset="0"/>
+                <a:buChar char="•"/>
+              </a:pPr>
+              <a:r>
+                <a:rPr lang="fr-FR" sz="1200" dirty="0"/>
+                <a:t>FIT_M (variance du modèle entre VL et VO): 0.64</a:t>
+              </a:r>
+            </a:p>
+            <a:p>
+              <a:pPr marL="171450" indent="-171450">
+                <a:buFont typeface="Arial" panose="020B0604020202020204" pitchFamily="34" charset="0"/>
+                <a:buChar char="•"/>
+              </a:pPr>
+              <a:r>
+                <a:rPr lang="fr-FR" sz="1200" dirty="0"/>
+                <a:t>FIT_S (variance du modèle des liens entre VL): 0.66</a:t>
+              </a:r>
+            </a:p>
+          </p:txBody>
+        </p:sp>
+      </p:grpSp>
+      <p:pic>
+        <p:nvPicPr>
+          <p:cNvPr id="3" name="Image 2">
+            <a:extLst>
+              <a:ext uri="{FF2B5EF4-FFF2-40B4-BE49-F238E27FC236}">
+                <a16:creationId xmlns:a16="http://schemas.microsoft.com/office/drawing/2014/main" id="{58A70BA5-EEBA-4ABF-8264-60B341B0D7EF}"/>
+              </a:ext>
+            </a:extLst>
+          </p:cNvPr>
+          <p:cNvPicPr>
+            <a:picLocks noChangeAspect="1"/>
+          </p:cNvPicPr>
+          <p:nvPr/>
+        </p:nvPicPr>
+        <p:blipFill>
+          <a:blip r:embed="rId2"/>
+          <a:stretch>
+            <a:fillRect/>
+          </a:stretch>
+        </p:blipFill>
+        <p:spPr>
+          <a:xfrm>
+            <a:off x="0" y="981074"/>
+            <a:ext cx="8201219" cy="5858014"/>
+          </a:xfrm>
+          <a:prstGeom prst="rect">
+            <a:avLst/>
+          </a:prstGeom>
+        </p:spPr>
+      </p:pic>
+    </p:spTree>
+    <p:extLst>
+      <p:ext uri="{BB962C8B-B14F-4D97-AF65-F5344CB8AC3E}">
+        <p14:creationId xmlns:p14="http://schemas.microsoft.com/office/powerpoint/2010/main" val="4286184544"/>
+      </p:ext>
+    </p:extLst>
+  </p:cSld>
+  <p:clrMapOvr>
+    <a:masterClrMapping/>
+  </p:clrMapOvr>
+</p:sld>
+</file>
+
+<file path=ppt/slides/slide16.xml><?xml version="1.0" encoding="utf-8"?>
+<p:sld xmlns:a="http://schemas.openxmlformats.org/drawingml/2006/main" xmlns:r="http://schemas.openxmlformats.org/officeDocument/2006/relationships" xmlns:p="http://schemas.openxmlformats.org/presentationml/2006/main">
+  <p:cSld>
+    <p:spTree>
+      <p:nvGrpSpPr>
+        <p:cNvPr id="1" name=""/>
+        <p:cNvGrpSpPr/>
+        <p:nvPr/>
+      </p:nvGrpSpPr>
+      <p:grpSpPr>
+        <a:xfrm>
+          <a:off x="0" y="0"/>
+          <a:ext cx="0" cy="0"/>
+          <a:chOff x="0" y="0"/>
+          <a:chExt cx="0" cy="0"/>
+        </a:xfrm>
+      </p:grpSpPr>
+      <p:pic>
+        <p:nvPicPr>
+          <p:cNvPr id="10" name="Image 9">
+            <a:extLst>
+              <a:ext uri="{FF2B5EF4-FFF2-40B4-BE49-F238E27FC236}">
+                <a16:creationId xmlns:a16="http://schemas.microsoft.com/office/drawing/2014/main" id="{4C515769-5B3D-438F-91F8-E34514007FE8}"/>
+              </a:ext>
+            </a:extLst>
+          </p:cNvPr>
+          <p:cNvPicPr>
+            <a:picLocks noChangeAspect="1"/>
+          </p:cNvPicPr>
+          <p:nvPr/>
+        </p:nvPicPr>
+        <p:blipFill>
+          <a:blip r:embed="rId2">
+            <a:extLst>
+              <a:ext uri="{28A0092B-C50C-407E-A947-70E740481C1C}">
+                <a14:useLocalDpi xmlns:a14="http://schemas.microsoft.com/office/drawing/2010/main" val="0"/>
+              </a:ext>
+            </a:extLst>
+          </a:blip>
+          <a:srcRect/>
+          <a:stretch/>
+        </p:blipFill>
+        <p:spPr>
+          <a:xfrm>
+            <a:off x="2667000" y="0"/>
+            <a:ext cx="6858000" cy="6858000"/>
+          </a:xfrm>
+          <a:prstGeom prst="rect">
+            <a:avLst/>
+          </a:prstGeom>
+        </p:spPr>
+      </p:pic>
+      <p:sp>
+        <p:nvSpPr>
+          <p:cNvPr id="2" name="Rectangle : carré corné 1">
+            <a:extLst>
+              <a:ext uri="{FF2B5EF4-FFF2-40B4-BE49-F238E27FC236}">
+                <a16:creationId xmlns:a16="http://schemas.microsoft.com/office/drawing/2014/main" id="{BFB28677-11DA-4608-8F21-FBC0FE5957EB}"/>
+              </a:ext>
+            </a:extLst>
+          </p:cNvPr>
+          <p:cNvSpPr/>
+          <p:nvPr/>
+        </p:nvSpPr>
+        <p:spPr>
+          <a:xfrm>
+            <a:off x="209725" y="620786"/>
+            <a:ext cx="2298583" cy="4379054"/>
+          </a:xfrm>
+          <a:prstGeom prst="foldedCorner">
+            <a:avLst/>
+          </a:prstGeom>
+          <a:solidFill>
+            <a:schemeClr val="bg1">
+              <a:lumMod val="85000"/>
+            </a:schemeClr>
+          </a:solidFill>
+        </p:spPr>
+        <p:style>
+          <a:lnRef idx="2">
+            <a:schemeClr val="accent1">
+              <a:shade val="50000"/>
+            </a:schemeClr>
+          </a:lnRef>
+          <a:fillRef idx="1">
+            <a:schemeClr val="accent1"/>
+          </a:fillRef>
+          <a:effectRef idx="0">
+            <a:schemeClr val="accent1"/>
+          </a:effectRef>
+          <a:fontRef idx="minor">
+            <a:schemeClr val="lt1"/>
+          </a:fontRef>
+        </p:style>
+        <p:txBody>
+          <a:bodyPr rtlCol="0" anchor="ctr"/>
+          <a:lstStyle/>
+          <a:p>
+            <a:pPr algn="ctr"/>
+            <a:endParaRPr lang="fr-FR"/>
+          </a:p>
+        </p:txBody>
+      </p:sp>
+      <p:sp>
+        <p:nvSpPr>
+          <p:cNvPr id="3" name="ZoneTexte 2">
+            <a:extLst>
+              <a:ext uri="{FF2B5EF4-FFF2-40B4-BE49-F238E27FC236}">
+                <a16:creationId xmlns:a16="http://schemas.microsoft.com/office/drawing/2014/main" id="{BA51F41B-C70C-48EF-90D9-550EFF142915}"/>
+              </a:ext>
+            </a:extLst>
+          </p:cNvPr>
+          <p:cNvSpPr txBox="1"/>
+          <p:nvPr/>
+        </p:nvSpPr>
+        <p:spPr>
+          <a:xfrm>
+            <a:off x="302004" y="746620"/>
+            <a:ext cx="2072080" cy="4185761"/>
+          </a:xfrm>
+          <a:prstGeom prst="rect">
+            <a:avLst/>
+          </a:prstGeom>
+          <a:noFill/>
+        </p:spPr>
+        <p:txBody>
+          <a:bodyPr wrap="square" rtlCol="0">
+            <a:spAutoFit/>
+          </a:bodyPr>
+          <a:lstStyle/>
+          <a:p>
+            <a:r>
+              <a:rPr lang="fr-FR" sz="1400" u="sng" dirty="0"/>
+              <a:t>Block AMC:</a:t>
+            </a:r>
+          </a:p>
+          <a:p>
+            <a:pPr marL="285750" indent="-285750">
+              <a:buFont typeface="Arial" panose="020B0604020202020204" pitchFamily="34" charset="0"/>
+              <a:buChar char="•"/>
+            </a:pPr>
+            <a:r>
+              <a:rPr lang="fr-FR" sz="1400" dirty="0"/>
+              <a:t>AMC ES C3G (+)</a:t>
+            </a:r>
+          </a:p>
+          <a:p>
+            <a:pPr marL="285750" indent="-285750">
+              <a:buFont typeface="Arial" panose="020B0604020202020204" pitchFamily="34" charset="0"/>
+              <a:buChar char="•"/>
+            </a:pPr>
+            <a:r>
+              <a:rPr lang="fr-FR" sz="1400" dirty="0"/>
+              <a:t>AMC ville C3G (+)</a:t>
+            </a:r>
+          </a:p>
+          <a:p>
+            <a:r>
+              <a:rPr lang="fr-FR" sz="1400" u="sng" dirty="0"/>
+              <a:t>Block </a:t>
+            </a:r>
+            <a:r>
+              <a:rPr lang="fr-FR" sz="1400" u="sng" dirty="0" err="1"/>
+              <a:t>Humans</a:t>
+            </a:r>
+            <a:r>
+              <a:rPr lang="fr-FR" sz="1400" u="sng" dirty="0"/>
+              <a:t>:</a:t>
+            </a:r>
+          </a:p>
+          <a:p>
+            <a:pPr marL="285750" indent="-285750">
+              <a:buFont typeface="Arial" panose="020B0604020202020204" pitchFamily="34" charset="0"/>
+              <a:buChar char="•"/>
+            </a:pPr>
+            <a:r>
+              <a:rPr lang="fr-FR" sz="1400" dirty="0" err="1"/>
+              <a:t>Medecins</a:t>
+            </a:r>
+            <a:r>
+              <a:rPr lang="fr-FR" sz="1400" dirty="0"/>
+              <a:t>/</a:t>
+            </a:r>
+            <a:r>
+              <a:rPr lang="fr-FR" sz="1400" dirty="0" err="1"/>
+              <a:t>hab</a:t>
+            </a:r>
+            <a:r>
+              <a:rPr lang="fr-FR" sz="1400" dirty="0"/>
+              <a:t> (+)</a:t>
+            </a:r>
+          </a:p>
+          <a:p>
+            <a:pPr marL="285750" indent="-285750">
+              <a:buFont typeface="Arial" panose="020B0604020202020204" pitchFamily="34" charset="0"/>
+              <a:buChar char="•"/>
+            </a:pPr>
+            <a:r>
+              <a:rPr lang="fr-FR" sz="1400" dirty="0" err="1"/>
+              <a:t>Tx</a:t>
+            </a:r>
+            <a:r>
+              <a:rPr lang="fr-FR" sz="1400" dirty="0"/>
+              <a:t> de pauvreté à 60% du revenu médian (+)</a:t>
+            </a:r>
+          </a:p>
+          <a:p>
+            <a:r>
+              <a:rPr lang="fr-FR" sz="1400" u="sng" dirty="0"/>
+              <a:t>Block </a:t>
+            </a:r>
+            <a:r>
+              <a:rPr lang="fr-FR" sz="1400" u="sng" dirty="0" err="1"/>
+              <a:t>Environment</a:t>
+            </a:r>
+            <a:r>
+              <a:rPr lang="fr-FR" sz="1400" u="sng" dirty="0"/>
+              <a:t>:</a:t>
+            </a:r>
+          </a:p>
+          <a:p>
+            <a:pPr marL="285750" indent="-285750">
+              <a:buFont typeface="Arial" panose="020B0604020202020204" pitchFamily="34" charset="0"/>
+              <a:buChar char="•"/>
+            </a:pPr>
+            <a:r>
+              <a:rPr lang="fr-FR" sz="1400" dirty="0"/>
+              <a:t>Air PM25 (+)</a:t>
+            </a:r>
+          </a:p>
+          <a:p>
+            <a:pPr marL="285750" indent="-285750">
+              <a:buFont typeface="Arial" panose="020B0604020202020204" pitchFamily="34" charset="0"/>
+              <a:buChar char="•"/>
+            </a:pPr>
+            <a:r>
+              <a:rPr lang="fr-FR" sz="1400" dirty="0"/>
+              <a:t>DJU froid (+)</a:t>
+            </a:r>
+          </a:p>
+          <a:p>
+            <a:r>
+              <a:rPr lang="fr-FR" sz="1400" u="sng" dirty="0"/>
+              <a:t>Block Animals:</a:t>
+            </a:r>
+          </a:p>
+          <a:p>
+            <a:pPr marL="285750" indent="-285750">
+              <a:buFont typeface="Arial" panose="020B0604020202020204" pitchFamily="34" charset="0"/>
+              <a:buChar char="•"/>
+            </a:pPr>
+            <a:r>
+              <a:rPr lang="fr-FR" sz="1400" dirty="0"/>
+              <a:t>AMR animaux de production C3G (+)</a:t>
+            </a:r>
+          </a:p>
+          <a:p>
+            <a:pPr marL="285750" indent="-285750">
+              <a:buFont typeface="Arial" panose="020B0604020202020204" pitchFamily="34" charset="0"/>
+              <a:buChar char="•"/>
+            </a:pPr>
+            <a:r>
+              <a:rPr lang="fr-FR" sz="1400" dirty="0"/>
+              <a:t>Densité animaux de production (+)</a:t>
+            </a:r>
+          </a:p>
+          <a:p>
+            <a:pPr marL="285750" indent="-285750">
+              <a:buFont typeface="Arial" panose="020B0604020202020204" pitchFamily="34" charset="0"/>
+              <a:buChar char="•"/>
+            </a:pPr>
+            <a:r>
+              <a:rPr lang="fr-FR" sz="1400" dirty="0"/>
+              <a:t>Densité de volailles (+)</a:t>
+            </a:r>
+          </a:p>
+          <a:p>
+            <a:pPr marL="285750" indent="-285750">
+              <a:buFont typeface="Arial" panose="020B0604020202020204" pitchFamily="34" charset="0"/>
+              <a:buChar char="•"/>
+            </a:pPr>
+            <a:r>
+              <a:rPr lang="fr-FR" sz="1400" dirty="0"/>
+              <a:t>Taux de possession de chats (-)</a:t>
+            </a:r>
+          </a:p>
+        </p:txBody>
+      </p:sp>
+    </p:spTree>
+    <p:extLst>
+      <p:ext uri="{BB962C8B-B14F-4D97-AF65-F5344CB8AC3E}">
+        <p14:creationId xmlns:p14="http://schemas.microsoft.com/office/powerpoint/2010/main" val="2876996813"/>
+      </p:ext>
+    </p:extLst>
+  </p:cSld>
+  <p:clrMapOvr>
+    <a:masterClrMapping/>
+  </p:clrMapOvr>
+</p:sld>
+</file>
+
+<file path=ppt/slides/slide17.xml><?xml version="1.0" encoding="utf-8"?>
+<p:sld xmlns:a="http://schemas.openxmlformats.org/drawingml/2006/main" xmlns:r="http://schemas.openxmlformats.org/officeDocument/2006/relationships" xmlns:p="http://schemas.openxmlformats.org/presentationml/2006/main">
+  <p:cSld>
+    <p:spTree>
+      <p:nvGrpSpPr>
+        <p:cNvPr id="1" name=""/>
+        <p:cNvGrpSpPr/>
+        <p:nvPr/>
+      </p:nvGrpSpPr>
+      <p:grpSpPr>
+        <a:xfrm>
+          <a:off x="0" y="0"/>
+          <a:ext cx="0" cy="0"/>
+          <a:chOff x="0" y="0"/>
+          <a:chExt cx="0" cy="0"/>
+        </a:xfrm>
+      </p:grpSpPr>
+      <p:sp>
+        <p:nvSpPr>
+          <p:cNvPr id="2" name="Titre 1">
+            <a:extLst>
+              <a:ext uri="{FF2B5EF4-FFF2-40B4-BE49-F238E27FC236}">
+                <a16:creationId xmlns:a16="http://schemas.microsoft.com/office/drawing/2014/main" id="{DBAE983D-80F2-4D13-9354-EA2BA22BB7B3}"/>
+              </a:ext>
+            </a:extLst>
+          </p:cNvPr>
+          <p:cNvSpPr>
+            <a:spLocks noGrp="1"/>
+          </p:cNvSpPr>
+          <p:nvPr>
+            <p:ph type="ctrTitle"/>
+          </p:nvPr>
+        </p:nvSpPr>
+        <p:spPr/>
+        <p:txBody>
+          <a:bodyPr/>
+          <a:lstStyle/>
+          <a:p>
+            <a:r>
+              <a:rPr lang="fr-FR" dirty="0"/>
+              <a:t>AMR Ville C3G</a:t>
+            </a:r>
+          </a:p>
+        </p:txBody>
+      </p:sp>
+    </p:spTree>
+    <p:extLst>
+      <p:ext uri="{BB962C8B-B14F-4D97-AF65-F5344CB8AC3E}">
+        <p14:creationId xmlns:p14="http://schemas.microsoft.com/office/powerpoint/2010/main" val="1466053889"/>
+      </p:ext>
+    </p:extLst>
+  </p:cSld>
+  <p:clrMapOvr>
+    <a:masterClrMapping/>
+  </p:clrMapOvr>
+</p:sld>
+</file>
+
+<file path=ppt/slides/slide18.xml><?xml version="1.0" encoding="utf-8"?>
+<p:sld xmlns:a="http://schemas.openxmlformats.org/drawingml/2006/main" xmlns:r="http://schemas.openxmlformats.org/officeDocument/2006/relationships" xmlns:p="http://schemas.openxmlformats.org/presentationml/2006/main">
+  <p:cSld>
+    <p:spTree>
+      <p:nvGrpSpPr>
+        <p:cNvPr id="1" name=""/>
+        <p:cNvGrpSpPr/>
+        <p:nvPr/>
+      </p:nvGrpSpPr>
+      <p:grpSpPr>
+        <a:xfrm>
+          <a:off x="0" y="0"/>
+          <a:ext cx="0" cy="0"/>
+          <a:chOff x="0" y="0"/>
+          <a:chExt cx="0" cy="0"/>
+        </a:xfrm>
+      </p:grpSpPr>
+      <p:sp>
+        <p:nvSpPr>
+          <p:cNvPr id="2" name="Titre 1">
+            <a:extLst>
+              <a:ext uri="{FF2B5EF4-FFF2-40B4-BE49-F238E27FC236}">
+                <a16:creationId xmlns:a16="http://schemas.microsoft.com/office/drawing/2014/main" id="{89530B02-42EB-42A6-98A3-D028D7F62B7A}"/>
+              </a:ext>
+            </a:extLst>
+          </p:cNvPr>
+          <p:cNvSpPr>
+            <a:spLocks noGrp="1"/>
+          </p:cNvSpPr>
+          <p:nvPr>
+            <p:ph type="title"/>
+          </p:nvPr>
+        </p:nvSpPr>
+        <p:spPr>
+          <a:xfrm>
+            <a:off x="418035" y="289826"/>
+            <a:ext cx="10515600" cy="750611"/>
+          </a:xfrm>
+        </p:spPr>
+        <p:txBody>
+          <a:bodyPr/>
+          <a:lstStyle/>
+          <a:p>
+            <a:r>
+              <a:rPr lang="fr-FR" dirty="0"/>
+              <a:t>Graphe du modèle</a:t>
+            </a:r>
+          </a:p>
+        </p:txBody>
+      </p:sp>
+      <p:grpSp>
+        <p:nvGrpSpPr>
+          <p:cNvPr id="8" name="Groupe 7">
+            <a:extLst>
+              <a:ext uri="{FF2B5EF4-FFF2-40B4-BE49-F238E27FC236}">
+                <a16:creationId xmlns:a16="http://schemas.microsoft.com/office/drawing/2014/main" id="{6D79E95E-0AD4-4D8C-BEA1-1160FAFC3588}"/>
+              </a:ext>
+            </a:extLst>
+          </p:cNvPr>
+          <p:cNvGrpSpPr/>
+          <p:nvPr/>
+        </p:nvGrpSpPr>
+        <p:grpSpPr>
+          <a:xfrm>
+            <a:off x="8787467" y="2374489"/>
+            <a:ext cx="2877424" cy="1686188"/>
+            <a:chOff x="8737133" y="1502034"/>
+            <a:chExt cx="2877424" cy="1686188"/>
+          </a:xfrm>
+        </p:grpSpPr>
+        <p:sp>
+          <p:nvSpPr>
+            <p:cNvPr id="6" name="Rectangle : carré corné 5">
+              <a:extLst>
+                <a:ext uri="{FF2B5EF4-FFF2-40B4-BE49-F238E27FC236}">
+                  <a16:creationId xmlns:a16="http://schemas.microsoft.com/office/drawing/2014/main" id="{AB167A05-8477-4AF9-BA6C-1482FCA752F1}"/>
+                </a:ext>
+              </a:extLst>
+            </p:cNvPr>
+            <p:cNvSpPr/>
+            <p:nvPr/>
+          </p:nvSpPr>
+          <p:spPr>
+            <a:xfrm>
+              <a:off x="8737133" y="1502034"/>
+              <a:ext cx="2877424" cy="1686188"/>
+            </a:xfrm>
+            <a:prstGeom prst="foldedCorner">
+              <a:avLst/>
+            </a:prstGeom>
+            <a:solidFill>
+              <a:schemeClr val="bg2"/>
+            </a:solidFill>
+          </p:spPr>
+          <p:style>
+            <a:lnRef idx="2">
+              <a:schemeClr val="accent1">
+                <a:shade val="50000"/>
+              </a:schemeClr>
+            </a:lnRef>
+            <a:fillRef idx="1">
+              <a:schemeClr val="accent1"/>
+            </a:fillRef>
+            <a:effectRef idx="0">
+              <a:schemeClr val="accent1"/>
+            </a:effectRef>
+            <a:fontRef idx="minor">
+              <a:schemeClr val="lt1"/>
+            </a:fontRef>
+          </p:style>
+          <p:txBody>
+            <a:bodyPr rtlCol="0" anchor="ctr"/>
+            <a:lstStyle/>
+            <a:p>
+              <a:pPr algn="ctr"/>
+              <a:endParaRPr lang="fr-FR"/>
+            </a:p>
+          </p:txBody>
+        </p:sp>
+        <p:sp>
+          <p:nvSpPr>
+            <p:cNvPr id="7" name="ZoneTexte 6">
+              <a:extLst>
+                <a:ext uri="{FF2B5EF4-FFF2-40B4-BE49-F238E27FC236}">
+                  <a16:creationId xmlns:a16="http://schemas.microsoft.com/office/drawing/2014/main" id="{4862162D-BEE4-4B1F-B905-D2F0635B5F2A}"/>
+                </a:ext>
+              </a:extLst>
+            </p:cNvPr>
+            <p:cNvSpPr txBox="1"/>
+            <p:nvPr/>
+          </p:nvSpPr>
+          <p:spPr>
+            <a:xfrm>
+              <a:off x="8883941" y="1652631"/>
+              <a:ext cx="2583809" cy="1384995"/>
+            </a:xfrm>
+            <a:prstGeom prst="rect">
+              <a:avLst/>
+            </a:prstGeom>
+            <a:noFill/>
+          </p:spPr>
+          <p:txBody>
+            <a:bodyPr wrap="square" rtlCol="0">
+              <a:spAutoFit/>
+            </a:bodyPr>
+            <a:lstStyle/>
+            <a:p>
+              <a:pPr marL="171450" indent="-171450">
+                <a:buFont typeface="Arial" panose="020B0604020202020204" pitchFamily="34" charset="0"/>
+                <a:buChar char="•"/>
+              </a:pPr>
+              <a:r>
+                <a:rPr lang="fr-FR" sz="1200" dirty="0"/>
+                <a:t>AFIT (variance globale du modèle corrigé par le nb de paramètres à estimer) : 0.52</a:t>
+              </a:r>
+            </a:p>
+            <a:p>
+              <a:pPr marL="171450" indent="-171450">
+                <a:buFont typeface="Arial" panose="020B0604020202020204" pitchFamily="34" charset="0"/>
+                <a:buChar char="•"/>
+              </a:pPr>
+              <a:r>
+                <a:rPr lang="fr-FR" sz="1200" dirty="0"/>
+                <a:t>FIT_M (variance du modèle entre VL et VO): 0.6</a:t>
+              </a:r>
+            </a:p>
+            <a:p>
+              <a:pPr marL="171450" indent="-171450">
+                <a:buFont typeface="Arial" panose="020B0604020202020204" pitchFamily="34" charset="0"/>
+                <a:buChar char="•"/>
+              </a:pPr>
+              <a:r>
+                <a:rPr lang="fr-FR" sz="1200" dirty="0"/>
+                <a:t>FIT_S (variance du modèle des liens entre VL): 0.75</a:t>
+              </a:r>
+            </a:p>
+          </p:txBody>
+        </p:sp>
+      </p:grpSp>
+      <p:pic>
+        <p:nvPicPr>
+          <p:cNvPr id="3074" name="Picture 2">
+            <a:extLst>
+              <a:ext uri="{FF2B5EF4-FFF2-40B4-BE49-F238E27FC236}">
+                <a16:creationId xmlns:a16="http://schemas.microsoft.com/office/drawing/2014/main" id="{C76258F2-7060-4171-AC64-A03072BF75FF}"/>
+              </a:ext>
+            </a:extLst>
+          </p:cNvPr>
+          <p:cNvPicPr>
+            <a:picLocks noChangeAspect="1" noChangeArrowheads="1"/>
+          </p:cNvPicPr>
+          <p:nvPr/>
+        </p:nvPicPr>
+        <p:blipFill>
+          <a:blip r:embed="rId2">
+            <a:extLst>
+              <a:ext uri="{28A0092B-C50C-407E-A947-70E740481C1C}">
+                <a14:useLocalDpi xmlns:a14="http://schemas.microsoft.com/office/drawing/2010/main" val="0"/>
+              </a:ext>
+            </a:extLst>
+          </a:blip>
+          <a:srcRect/>
+          <a:stretch>
+            <a:fillRect/>
+          </a:stretch>
+        </p:blipFill>
+        <p:spPr bwMode="auto">
+          <a:xfrm>
+            <a:off x="92278" y="1086037"/>
+            <a:ext cx="7907323" cy="5648088"/>
+          </a:xfrm>
+          <a:prstGeom prst="rect">
+            <a:avLst/>
+          </a:prstGeom>
+          <a:noFill/>
+          <a:extLst>
+            <a:ext uri="{909E8E84-426E-40DD-AFC4-6F175D3DCCD1}">
+              <a14:hiddenFill xmlns:a14="http://schemas.microsoft.com/office/drawing/2010/main">
+                <a:solidFill>
+                  <a:srgbClr val="FFFFFF"/>
+                </a:solidFill>
+              </a14:hiddenFill>
+            </a:ext>
+          </a:extLst>
+        </p:spPr>
+      </p:pic>
+    </p:spTree>
+    <p:extLst>
+      <p:ext uri="{BB962C8B-B14F-4D97-AF65-F5344CB8AC3E}">
+        <p14:creationId xmlns:p14="http://schemas.microsoft.com/office/powerpoint/2010/main" val="4147796717"/>
+      </p:ext>
+    </p:extLst>
+  </p:cSld>
+  <p:clrMapOvr>
+    <a:masterClrMapping/>
+  </p:clrMapOvr>
+</p:sld>
+</file>
+
+<file path=ppt/slides/slide19.xml><?xml version="1.0" encoding="utf-8"?>
+<p:sld xmlns:a="http://schemas.openxmlformats.org/drawingml/2006/main" xmlns:r="http://schemas.openxmlformats.org/officeDocument/2006/relationships" xmlns:p="http://schemas.openxmlformats.org/presentationml/2006/main">
+  <p:cSld>
+    <p:spTree>
+      <p:nvGrpSpPr>
+        <p:cNvPr id="1" name=""/>
+        <p:cNvGrpSpPr/>
+        <p:nvPr/>
+      </p:nvGrpSpPr>
+      <p:grpSpPr>
+        <a:xfrm>
+          <a:off x="0" y="0"/>
+          <a:ext cx="0" cy="0"/>
+          <a:chOff x="0" y="0"/>
+          <a:chExt cx="0" cy="0"/>
+        </a:xfrm>
+      </p:grpSpPr>
+      <p:pic>
+        <p:nvPicPr>
+          <p:cNvPr id="10" name="Image 9">
+            <a:extLst>
+              <a:ext uri="{FF2B5EF4-FFF2-40B4-BE49-F238E27FC236}">
+                <a16:creationId xmlns:a16="http://schemas.microsoft.com/office/drawing/2014/main" id="{4C515769-5B3D-438F-91F8-E34514007FE8}"/>
+              </a:ext>
+            </a:extLst>
+          </p:cNvPr>
+          <p:cNvPicPr>
+            <a:picLocks noChangeAspect="1"/>
+          </p:cNvPicPr>
+          <p:nvPr/>
+        </p:nvPicPr>
+        <p:blipFill>
+          <a:blip r:embed="rId2">
+            <a:extLst>
+              <a:ext uri="{28A0092B-C50C-407E-A947-70E740481C1C}">
+                <a14:useLocalDpi xmlns:a14="http://schemas.microsoft.com/office/drawing/2010/main" val="0"/>
+              </a:ext>
+            </a:extLst>
+          </a:blip>
+          <a:srcRect/>
+          <a:stretch/>
+        </p:blipFill>
+        <p:spPr>
+          <a:xfrm>
+            <a:off x="2667000" y="0"/>
+            <a:ext cx="6858000" cy="6858000"/>
+          </a:xfrm>
+          <a:prstGeom prst="rect">
+            <a:avLst/>
+          </a:prstGeom>
+        </p:spPr>
+      </p:pic>
+      <p:sp>
+        <p:nvSpPr>
+          <p:cNvPr id="2" name="Rectangle : carré corné 1">
+            <a:extLst>
+              <a:ext uri="{FF2B5EF4-FFF2-40B4-BE49-F238E27FC236}">
+                <a16:creationId xmlns:a16="http://schemas.microsoft.com/office/drawing/2014/main" id="{BFB28677-11DA-4608-8F21-FBC0FE5957EB}"/>
+              </a:ext>
+            </a:extLst>
+          </p:cNvPr>
+          <p:cNvSpPr/>
+          <p:nvPr/>
+        </p:nvSpPr>
+        <p:spPr>
+          <a:xfrm>
+            <a:off x="209725" y="620786"/>
+            <a:ext cx="2298583" cy="4613944"/>
+          </a:xfrm>
+          <a:prstGeom prst="foldedCorner">
+            <a:avLst/>
+          </a:prstGeom>
+          <a:solidFill>
+            <a:schemeClr val="bg1">
+              <a:lumMod val="85000"/>
+            </a:schemeClr>
+          </a:solidFill>
+        </p:spPr>
+        <p:style>
+          <a:lnRef idx="2">
+            <a:schemeClr val="accent1">
+              <a:shade val="50000"/>
+            </a:schemeClr>
+          </a:lnRef>
+          <a:fillRef idx="1">
+            <a:schemeClr val="accent1"/>
+          </a:fillRef>
+          <a:effectRef idx="0">
+            <a:schemeClr val="accent1"/>
+          </a:effectRef>
+          <a:fontRef idx="minor">
+            <a:schemeClr val="lt1"/>
+          </a:fontRef>
+        </p:style>
+        <p:txBody>
+          <a:bodyPr rtlCol="0" anchor="ctr"/>
+          <a:lstStyle/>
+          <a:p>
+            <a:pPr algn="ctr"/>
+            <a:endParaRPr lang="fr-FR"/>
+          </a:p>
+        </p:txBody>
+      </p:sp>
+      <p:sp>
+        <p:nvSpPr>
+          <p:cNvPr id="3" name="ZoneTexte 2">
+            <a:extLst>
+              <a:ext uri="{FF2B5EF4-FFF2-40B4-BE49-F238E27FC236}">
+                <a16:creationId xmlns:a16="http://schemas.microsoft.com/office/drawing/2014/main" id="{BA51F41B-C70C-48EF-90D9-550EFF142915}"/>
+              </a:ext>
+            </a:extLst>
+          </p:cNvPr>
+          <p:cNvSpPr txBox="1"/>
+          <p:nvPr/>
+        </p:nvSpPr>
+        <p:spPr>
+          <a:xfrm>
+            <a:off x="302004" y="746620"/>
+            <a:ext cx="2072080" cy="4401205"/>
+          </a:xfrm>
+          <a:prstGeom prst="rect">
+            <a:avLst/>
+          </a:prstGeom>
+          <a:noFill/>
+        </p:spPr>
+        <p:txBody>
+          <a:bodyPr wrap="square" rtlCol="0">
+            <a:spAutoFit/>
+          </a:bodyPr>
+          <a:lstStyle/>
+          <a:p>
+            <a:r>
+              <a:rPr lang="fr-FR" sz="1400" u="sng" dirty="0"/>
+              <a:t>Block AMC:</a:t>
+            </a:r>
+          </a:p>
+          <a:p>
+            <a:pPr marL="285750" indent="-285750">
+              <a:buFont typeface="Arial" panose="020B0604020202020204" pitchFamily="34" charset="0"/>
+              <a:buChar char="•"/>
+            </a:pPr>
+            <a:r>
+              <a:rPr lang="fr-FR" sz="1400" dirty="0"/>
+              <a:t>AMC ES C3G (+)</a:t>
+            </a:r>
+          </a:p>
+          <a:p>
+            <a:pPr marL="285750" indent="-285750">
+              <a:buFont typeface="Arial" panose="020B0604020202020204" pitchFamily="34" charset="0"/>
+              <a:buChar char="•"/>
+            </a:pPr>
+            <a:r>
+              <a:rPr lang="fr-FR" sz="1400" dirty="0"/>
+              <a:t>AMC ville totale (+)</a:t>
+            </a:r>
+          </a:p>
+          <a:p>
+            <a:r>
+              <a:rPr lang="fr-FR" sz="1400" u="sng" dirty="0"/>
+              <a:t>Block </a:t>
+            </a:r>
+            <a:r>
+              <a:rPr lang="fr-FR" sz="1400" u="sng" dirty="0" err="1"/>
+              <a:t>Humans</a:t>
+            </a:r>
+            <a:r>
+              <a:rPr lang="fr-FR" sz="1400" u="sng" dirty="0"/>
+              <a:t>:</a:t>
+            </a:r>
+          </a:p>
+          <a:p>
+            <a:pPr marL="285750" indent="-285750">
+              <a:buFont typeface="Arial" panose="020B0604020202020204" pitchFamily="34" charset="0"/>
+              <a:buChar char="•"/>
+            </a:pPr>
+            <a:r>
+              <a:rPr lang="fr-FR" sz="1400" dirty="0" err="1"/>
+              <a:t>Medecins</a:t>
+            </a:r>
+            <a:r>
+              <a:rPr lang="fr-FR" sz="1400" dirty="0"/>
+              <a:t>/</a:t>
+            </a:r>
+            <a:r>
+              <a:rPr lang="fr-FR" sz="1400" dirty="0" err="1"/>
+              <a:t>hab</a:t>
+            </a:r>
+            <a:r>
+              <a:rPr lang="fr-FR" sz="1400" dirty="0"/>
+              <a:t> (+)</a:t>
+            </a:r>
+          </a:p>
+          <a:p>
+            <a:pPr marL="285750" indent="-285750">
+              <a:buFont typeface="Arial" panose="020B0604020202020204" pitchFamily="34" charset="0"/>
+              <a:buChar char="•"/>
+            </a:pPr>
+            <a:r>
+              <a:rPr lang="fr-FR" sz="1400" dirty="0" err="1"/>
+              <a:t>Tx</a:t>
+            </a:r>
+            <a:r>
+              <a:rPr lang="fr-FR" sz="1400" dirty="0"/>
+              <a:t> de pauvreté à 60% du revenu médian (+)</a:t>
+            </a:r>
+          </a:p>
+          <a:p>
+            <a:r>
+              <a:rPr lang="fr-FR" sz="1400" u="sng" dirty="0"/>
+              <a:t>Block </a:t>
+            </a:r>
+            <a:r>
+              <a:rPr lang="fr-FR" sz="1400" u="sng" dirty="0" err="1"/>
+              <a:t>Environment</a:t>
+            </a:r>
+            <a:r>
+              <a:rPr lang="fr-FR" sz="1400" u="sng" dirty="0"/>
+              <a:t>:</a:t>
+            </a:r>
+          </a:p>
+          <a:p>
+            <a:pPr marL="285750" indent="-285750">
+              <a:buFont typeface="Arial" panose="020B0604020202020204" pitchFamily="34" charset="0"/>
+              <a:buChar char="•"/>
+            </a:pPr>
+            <a:r>
+              <a:rPr lang="fr-FR" sz="1400" dirty="0"/>
+              <a:t>Air PM25 (+)</a:t>
+            </a:r>
+          </a:p>
+          <a:p>
+            <a:pPr marL="285750" indent="-285750">
+              <a:buFont typeface="Arial" panose="020B0604020202020204" pitchFamily="34" charset="0"/>
+              <a:buChar char="•"/>
+            </a:pPr>
+            <a:r>
+              <a:rPr lang="fr-FR" sz="1400" dirty="0"/>
+              <a:t>DJU froid (+)</a:t>
+            </a:r>
+          </a:p>
+          <a:p>
+            <a:r>
+              <a:rPr lang="fr-FR" sz="1400" u="sng" dirty="0"/>
+              <a:t>Block Animals:</a:t>
+            </a:r>
+          </a:p>
+          <a:p>
+            <a:pPr marL="285750" indent="-285750">
+              <a:buFont typeface="Arial" panose="020B0604020202020204" pitchFamily="34" charset="0"/>
+              <a:buChar char="•"/>
+            </a:pPr>
+            <a:r>
+              <a:rPr lang="fr-FR" sz="1400" dirty="0"/>
+              <a:t>AMR animaux de production C3G (+)</a:t>
+            </a:r>
+          </a:p>
+          <a:p>
+            <a:pPr marL="285750" indent="-285750">
+              <a:buFont typeface="Arial" panose="020B0604020202020204" pitchFamily="34" charset="0"/>
+              <a:buChar char="•"/>
+            </a:pPr>
+            <a:r>
+              <a:rPr lang="fr-FR" sz="1400" dirty="0"/>
+              <a:t>AMR animaux de compagnie amoxicilline (-)</a:t>
+            </a:r>
+          </a:p>
+          <a:p>
+            <a:pPr marL="285750" indent="-285750">
+              <a:buFont typeface="Arial" panose="020B0604020202020204" pitchFamily="34" charset="0"/>
+              <a:buChar char="•"/>
+            </a:pPr>
+            <a:r>
+              <a:rPr lang="fr-FR" sz="1400" dirty="0"/>
+              <a:t>Densité de volailles (+)</a:t>
+            </a:r>
+          </a:p>
+          <a:p>
+            <a:pPr marL="285750" indent="-285750">
+              <a:buFont typeface="Arial" panose="020B0604020202020204" pitchFamily="34" charset="0"/>
+              <a:buChar char="•"/>
+            </a:pPr>
+            <a:r>
+              <a:rPr lang="fr-FR" sz="1400" dirty="0"/>
+              <a:t>Nb de vetos par chevaux (+)</a:t>
+            </a:r>
+          </a:p>
+        </p:txBody>
+      </p:sp>
+    </p:spTree>
+    <p:extLst>
+      <p:ext uri="{BB962C8B-B14F-4D97-AF65-F5344CB8AC3E}">
+        <p14:creationId xmlns:p14="http://schemas.microsoft.com/office/powerpoint/2010/main" val="4259683073"/>
+      </p:ext>
+    </p:extLst>
+  </p:cSld>
+  <p:clrMapOvr>
+    <a:masterClrMapping/>
+  </p:clrMapOvr>
+</p:sld>
+</file>
+
 <file path=ppt/slides/slide2.xml><?xml version="1.0" encoding="utf-8"?>
 <p:sld xmlns:a="http://schemas.openxmlformats.org/drawingml/2006/main" xmlns:r="http://schemas.openxmlformats.org/officeDocument/2006/relationships" xmlns:p="http://schemas.openxmlformats.org/presentationml/2006/main">
   <p:cSld>
@@ -3692,10 +5782,1126 @@
           </a:prstGeom>
         </p:spPr>
       </p:pic>
+      <p:sp>
+        <p:nvSpPr>
+          <p:cNvPr id="2" name="Rectangle : carré corné 1">
+            <a:extLst>
+              <a:ext uri="{FF2B5EF4-FFF2-40B4-BE49-F238E27FC236}">
+                <a16:creationId xmlns:a16="http://schemas.microsoft.com/office/drawing/2014/main" id="{BFB28677-11DA-4608-8F21-FBC0FE5957EB}"/>
+              </a:ext>
+            </a:extLst>
+          </p:cNvPr>
+          <p:cNvSpPr/>
+          <p:nvPr/>
+        </p:nvSpPr>
+        <p:spPr>
+          <a:xfrm>
+            <a:off x="209725" y="620785"/>
+            <a:ext cx="2298583" cy="5251509"/>
+          </a:xfrm>
+          <a:prstGeom prst="foldedCorner">
+            <a:avLst/>
+          </a:prstGeom>
+          <a:solidFill>
+            <a:schemeClr val="bg1">
+              <a:lumMod val="85000"/>
+            </a:schemeClr>
+          </a:solidFill>
+        </p:spPr>
+        <p:style>
+          <a:lnRef idx="2">
+            <a:schemeClr val="accent1">
+              <a:shade val="50000"/>
+            </a:schemeClr>
+          </a:lnRef>
+          <a:fillRef idx="1">
+            <a:schemeClr val="accent1"/>
+          </a:fillRef>
+          <a:effectRef idx="0">
+            <a:schemeClr val="accent1"/>
+          </a:effectRef>
+          <a:fontRef idx="minor">
+            <a:schemeClr val="lt1"/>
+          </a:fontRef>
+        </p:style>
+        <p:txBody>
+          <a:bodyPr rtlCol="0" anchor="ctr"/>
+          <a:lstStyle/>
+          <a:p>
+            <a:pPr algn="ctr"/>
+            <a:endParaRPr lang="fr-FR"/>
+          </a:p>
+        </p:txBody>
+      </p:sp>
+      <p:sp>
+        <p:nvSpPr>
+          <p:cNvPr id="3" name="ZoneTexte 2">
+            <a:extLst>
+              <a:ext uri="{FF2B5EF4-FFF2-40B4-BE49-F238E27FC236}">
+                <a16:creationId xmlns:a16="http://schemas.microsoft.com/office/drawing/2014/main" id="{BA51F41B-C70C-48EF-90D9-550EFF142915}"/>
+              </a:ext>
+            </a:extLst>
+          </p:cNvPr>
+          <p:cNvSpPr txBox="1"/>
+          <p:nvPr/>
+        </p:nvSpPr>
+        <p:spPr>
+          <a:xfrm>
+            <a:off x="302004" y="746620"/>
+            <a:ext cx="2072080" cy="4185761"/>
+          </a:xfrm>
+          <a:prstGeom prst="rect">
+            <a:avLst/>
+          </a:prstGeom>
+          <a:noFill/>
+        </p:spPr>
+        <p:txBody>
+          <a:bodyPr wrap="square" rtlCol="0">
+            <a:spAutoFit/>
+          </a:bodyPr>
+          <a:lstStyle/>
+          <a:p>
+            <a:r>
+              <a:rPr lang="fr-FR" sz="1400" u="sng" dirty="0"/>
+              <a:t>Block AMC:</a:t>
+            </a:r>
+          </a:p>
+          <a:p>
+            <a:pPr marL="285750" indent="-285750">
+              <a:buFont typeface="Arial" panose="020B0604020202020204" pitchFamily="34" charset="0"/>
+              <a:buChar char="•"/>
+            </a:pPr>
+            <a:r>
+              <a:rPr lang="fr-FR" sz="1400" dirty="0"/>
+              <a:t>AMC ville FQ (+)</a:t>
+            </a:r>
+          </a:p>
+          <a:p>
+            <a:pPr marL="285750" indent="-285750">
+              <a:buFont typeface="Arial" panose="020B0604020202020204" pitchFamily="34" charset="0"/>
+              <a:buChar char="•"/>
+            </a:pPr>
+            <a:r>
+              <a:rPr lang="fr-FR" sz="1400" dirty="0"/>
+              <a:t>AMC ES FQ (+)</a:t>
+            </a:r>
+          </a:p>
+          <a:p>
+            <a:r>
+              <a:rPr lang="fr-FR" sz="1400" u="sng" dirty="0"/>
+              <a:t>Block </a:t>
+            </a:r>
+            <a:r>
+              <a:rPr lang="fr-FR" sz="1400" u="sng" dirty="0" err="1"/>
+              <a:t>Humans</a:t>
+            </a:r>
+            <a:r>
+              <a:rPr lang="fr-FR" sz="1400" u="sng" dirty="0"/>
+              <a:t>:</a:t>
+            </a:r>
+          </a:p>
+          <a:p>
+            <a:pPr marL="285750" indent="-285750">
+              <a:buFont typeface="Arial" panose="020B0604020202020204" pitchFamily="34" charset="0"/>
+              <a:buChar char="•"/>
+            </a:pPr>
+            <a:r>
+              <a:rPr lang="fr-FR" sz="1400" dirty="0" err="1"/>
+              <a:t>Medecins</a:t>
+            </a:r>
+            <a:r>
+              <a:rPr lang="fr-FR" sz="1400" dirty="0"/>
+              <a:t>/</a:t>
+            </a:r>
+            <a:r>
+              <a:rPr lang="fr-FR" sz="1400" dirty="0" err="1"/>
+              <a:t>hab</a:t>
+            </a:r>
+            <a:r>
+              <a:rPr lang="fr-FR" sz="1400" dirty="0"/>
+              <a:t> (+)</a:t>
+            </a:r>
+          </a:p>
+          <a:p>
+            <a:pPr marL="285750" indent="-285750">
+              <a:buFont typeface="Arial" panose="020B0604020202020204" pitchFamily="34" charset="0"/>
+              <a:buChar char="•"/>
+            </a:pPr>
+            <a:r>
+              <a:rPr lang="fr-FR" sz="1400" dirty="0"/>
+              <a:t>EQI (-)</a:t>
+            </a:r>
+          </a:p>
+          <a:p>
+            <a:r>
+              <a:rPr lang="fr-FR" sz="1400" u="sng" dirty="0"/>
+              <a:t>Block </a:t>
+            </a:r>
+            <a:r>
+              <a:rPr lang="fr-FR" sz="1400" u="sng" dirty="0" err="1"/>
+              <a:t>Environment</a:t>
+            </a:r>
+            <a:r>
+              <a:rPr lang="fr-FR" sz="1400" u="sng" dirty="0"/>
+              <a:t>:</a:t>
+            </a:r>
+          </a:p>
+          <a:p>
+            <a:pPr marL="285750" indent="-285750">
+              <a:buFont typeface="Arial" panose="020B0604020202020204" pitchFamily="34" charset="0"/>
+              <a:buChar char="•"/>
+            </a:pPr>
+            <a:r>
+              <a:rPr lang="fr-FR" sz="1400" dirty="0"/>
+              <a:t>Air PM25 (+)</a:t>
+            </a:r>
+          </a:p>
+          <a:p>
+            <a:pPr marL="285750" indent="-285750">
+              <a:buFont typeface="Arial" panose="020B0604020202020204" pitchFamily="34" charset="0"/>
+              <a:buChar char="•"/>
+            </a:pPr>
+            <a:r>
+              <a:rPr lang="fr-FR" sz="1400" dirty="0"/>
+              <a:t>DJU froid (+)</a:t>
+            </a:r>
+          </a:p>
+          <a:p>
+            <a:r>
+              <a:rPr lang="fr-FR" sz="1400" u="sng" dirty="0"/>
+              <a:t>Block Animals:</a:t>
+            </a:r>
+          </a:p>
+          <a:p>
+            <a:pPr marL="285750" indent="-285750">
+              <a:buFont typeface="Arial" panose="020B0604020202020204" pitchFamily="34" charset="0"/>
+              <a:buChar char="•"/>
+            </a:pPr>
+            <a:r>
+              <a:rPr lang="fr-FR" sz="1400" dirty="0"/>
+              <a:t>AMR animaux de compagnie FQ (+)</a:t>
+            </a:r>
+          </a:p>
+          <a:p>
+            <a:pPr marL="285750" indent="-285750">
+              <a:buFont typeface="Arial" panose="020B0604020202020204" pitchFamily="34" charset="0"/>
+              <a:buChar char="•"/>
+            </a:pPr>
+            <a:r>
+              <a:rPr lang="fr-FR" sz="1400" dirty="0"/>
+              <a:t>Nb de vetos par animaux de compagnie (+)</a:t>
+            </a:r>
+          </a:p>
+          <a:p>
+            <a:pPr marL="285750" indent="-285750">
+              <a:buFont typeface="Arial" panose="020B0604020202020204" pitchFamily="34" charset="0"/>
+              <a:buChar char="•"/>
+            </a:pPr>
+            <a:r>
+              <a:rPr lang="fr-FR" sz="1400" dirty="0"/>
+              <a:t>Densité animaux de production (-)</a:t>
+            </a:r>
+          </a:p>
+          <a:p>
+            <a:pPr marL="285750" indent="-285750">
+              <a:buFont typeface="Arial" panose="020B0604020202020204" pitchFamily="34" charset="0"/>
+              <a:buChar char="•"/>
+            </a:pPr>
+            <a:r>
+              <a:rPr lang="fr-FR" sz="1400" dirty="0"/>
+              <a:t>AMR animaux de production FQ (-)</a:t>
+            </a:r>
+          </a:p>
+        </p:txBody>
+      </p:sp>
     </p:spTree>
     <p:extLst>
       <p:ext uri="{BB962C8B-B14F-4D97-AF65-F5344CB8AC3E}">
         <p14:creationId xmlns:p14="http://schemas.microsoft.com/office/powerpoint/2010/main" val="1375527678"/>
+      </p:ext>
+    </p:extLst>
+  </p:cSld>
+  <p:clrMapOvr>
+    <a:masterClrMapping/>
+  </p:clrMapOvr>
+</p:sld>
+</file>
+
+<file path=ppt/slides/slide5.xml><?xml version="1.0" encoding="utf-8"?>
+<p:sld xmlns:a="http://schemas.openxmlformats.org/drawingml/2006/main" xmlns:r="http://schemas.openxmlformats.org/officeDocument/2006/relationships" xmlns:p="http://schemas.openxmlformats.org/presentationml/2006/main">
+  <p:cSld>
+    <p:spTree>
+      <p:nvGrpSpPr>
+        <p:cNvPr id="1" name=""/>
+        <p:cNvGrpSpPr/>
+        <p:nvPr/>
+      </p:nvGrpSpPr>
+      <p:grpSpPr>
+        <a:xfrm>
+          <a:off x="0" y="0"/>
+          <a:ext cx="0" cy="0"/>
+          <a:chOff x="0" y="0"/>
+          <a:chExt cx="0" cy="0"/>
+        </a:xfrm>
+      </p:grpSpPr>
+      <p:sp>
+        <p:nvSpPr>
+          <p:cNvPr id="2" name="Titre 1">
+            <a:extLst>
+              <a:ext uri="{FF2B5EF4-FFF2-40B4-BE49-F238E27FC236}">
+                <a16:creationId xmlns:a16="http://schemas.microsoft.com/office/drawing/2014/main" id="{DBAE983D-80F2-4D13-9354-EA2BA22BB7B3}"/>
+              </a:ext>
+            </a:extLst>
+          </p:cNvPr>
+          <p:cNvSpPr>
+            <a:spLocks noGrp="1"/>
+          </p:cNvSpPr>
+          <p:nvPr>
+            <p:ph type="ctrTitle"/>
+          </p:nvPr>
+        </p:nvSpPr>
+        <p:spPr/>
+        <p:txBody>
+          <a:bodyPr/>
+          <a:lstStyle/>
+          <a:p>
+            <a:r>
+              <a:rPr lang="fr-FR" dirty="0"/>
+              <a:t>AMR EHPAD FQ</a:t>
+            </a:r>
+          </a:p>
+        </p:txBody>
+      </p:sp>
+    </p:spTree>
+    <p:extLst>
+      <p:ext uri="{BB962C8B-B14F-4D97-AF65-F5344CB8AC3E}">
+        <p14:creationId xmlns:p14="http://schemas.microsoft.com/office/powerpoint/2010/main" val="747549552"/>
+      </p:ext>
+    </p:extLst>
+  </p:cSld>
+  <p:clrMapOvr>
+    <a:masterClrMapping/>
+  </p:clrMapOvr>
+</p:sld>
+</file>
+
+<file path=ppt/slides/slide6.xml><?xml version="1.0" encoding="utf-8"?>
+<p:sld xmlns:a="http://schemas.openxmlformats.org/drawingml/2006/main" xmlns:r="http://schemas.openxmlformats.org/officeDocument/2006/relationships" xmlns:p="http://schemas.openxmlformats.org/presentationml/2006/main">
+  <p:cSld>
+    <p:spTree>
+      <p:nvGrpSpPr>
+        <p:cNvPr id="1" name=""/>
+        <p:cNvGrpSpPr/>
+        <p:nvPr/>
+      </p:nvGrpSpPr>
+      <p:grpSpPr>
+        <a:xfrm>
+          <a:off x="0" y="0"/>
+          <a:ext cx="0" cy="0"/>
+          <a:chOff x="0" y="0"/>
+          <a:chExt cx="0" cy="0"/>
+        </a:xfrm>
+      </p:grpSpPr>
+      <p:sp>
+        <p:nvSpPr>
+          <p:cNvPr id="2" name="Titre 1">
+            <a:extLst>
+              <a:ext uri="{FF2B5EF4-FFF2-40B4-BE49-F238E27FC236}">
+                <a16:creationId xmlns:a16="http://schemas.microsoft.com/office/drawing/2014/main" id="{89530B02-42EB-42A6-98A3-D028D7F62B7A}"/>
+              </a:ext>
+            </a:extLst>
+          </p:cNvPr>
+          <p:cNvSpPr>
+            <a:spLocks noGrp="1"/>
+          </p:cNvSpPr>
+          <p:nvPr>
+            <p:ph type="title"/>
+          </p:nvPr>
+        </p:nvSpPr>
+        <p:spPr>
+          <a:xfrm>
+            <a:off x="418035" y="289826"/>
+            <a:ext cx="10515600" cy="750611"/>
+          </a:xfrm>
+        </p:spPr>
+        <p:txBody>
+          <a:bodyPr/>
+          <a:lstStyle/>
+          <a:p>
+            <a:r>
+              <a:rPr lang="fr-FR" dirty="0"/>
+              <a:t>Graphe du modèle</a:t>
+            </a:r>
+          </a:p>
+        </p:txBody>
+      </p:sp>
+      <p:grpSp>
+        <p:nvGrpSpPr>
+          <p:cNvPr id="8" name="Groupe 7">
+            <a:extLst>
+              <a:ext uri="{FF2B5EF4-FFF2-40B4-BE49-F238E27FC236}">
+                <a16:creationId xmlns:a16="http://schemas.microsoft.com/office/drawing/2014/main" id="{6D79E95E-0AD4-4D8C-BEA1-1160FAFC3588}"/>
+              </a:ext>
+            </a:extLst>
+          </p:cNvPr>
+          <p:cNvGrpSpPr/>
+          <p:nvPr/>
+        </p:nvGrpSpPr>
+        <p:grpSpPr>
+          <a:xfrm>
+            <a:off x="8787467" y="2374489"/>
+            <a:ext cx="2877424" cy="1686188"/>
+            <a:chOff x="8737133" y="1502034"/>
+            <a:chExt cx="2877424" cy="1686188"/>
+          </a:xfrm>
+        </p:grpSpPr>
+        <p:sp>
+          <p:nvSpPr>
+            <p:cNvPr id="6" name="Rectangle : carré corné 5">
+              <a:extLst>
+                <a:ext uri="{FF2B5EF4-FFF2-40B4-BE49-F238E27FC236}">
+                  <a16:creationId xmlns:a16="http://schemas.microsoft.com/office/drawing/2014/main" id="{AB167A05-8477-4AF9-BA6C-1482FCA752F1}"/>
+                </a:ext>
+              </a:extLst>
+            </p:cNvPr>
+            <p:cNvSpPr/>
+            <p:nvPr/>
+          </p:nvSpPr>
+          <p:spPr>
+            <a:xfrm>
+              <a:off x="8737133" y="1502034"/>
+              <a:ext cx="2877424" cy="1686188"/>
+            </a:xfrm>
+            <a:prstGeom prst="foldedCorner">
+              <a:avLst/>
+            </a:prstGeom>
+            <a:solidFill>
+              <a:schemeClr val="bg2"/>
+            </a:solidFill>
+          </p:spPr>
+          <p:style>
+            <a:lnRef idx="2">
+              <a:schemeClr val="accent1">
+                <a:shade val="50000"/>
+              </a:schemeClr>
+            </a:lnRef>
+            <a:fillRef idx="1">
+              <a:schemeClr val="accent1"/>
+            </a:fillRef>
+            <a:effectRef idx="0">
+              <a:schemeClr val="accent1"/>
+            </a:effectRef>
+            <a:fontRef idx="minor">
+              <a:schemeClr val="lt1"/>
+            </a:fontRef>
+          </p:style>
+          <p:txBody>
+            <a:bodyPr rtlCol="0" anchor="ctr"/>
+            <a:lstStyle/>
+            <a:p>
+              <a:pPr algn="ctr"/>
+              <a:endParaRPr lang="fr-FR"/>
+            </a:p>
+          </p:txBody>
+        </p:sp>
+        <p:sp>
+          <p:nvSpPr>
+            <p:cNvPr id="7" name="ZoneTexte 6">
+              <a:extLst>
+                <a:ext uri="{FF2B5EF4-FFF2-40B4-BE49-F238E27FC236}">
+                  <a16:creationId xmlns:a16="http://schemas.microsoft.com/office/drawing/2014/main" id="{4862162D-BEE4-4B1F-B905-D2F0635B5F2A}"/>
+                </a:ext>
+              </a:extLst>
+            </p:cNvPr>
+            <p:cNvSpPr txBox="1"/>
+            <p:nvPr/>
+          </p:nvSpPr>
+          <p:spPr>
+            <a:xfrm>
+              <a:off x="8883941" y="1652631"/>
+              <a:ext cx="2583809" cy="1384995"/>
+            </a:xfrm>
+            <a:prstGeom prst="rect">
+              <a:avLst/>
+            </a:prstGeom>
+            <a:noFill/>
+          </p:spPr>
+          <p:txBody>
+            <a:bodyPr wrap="square" rtlCol="0">
+              <a:spAutoFit/>
+            </a:bodyPr>
+            <a:lstStyle/>
+            <a:p>
+              <a:pPr marL="171450" indent="-171450">
+                <a:buFont typeface="Arial" panose="020B0604020202020204" pitchFamily="34" charset="0"/>
+                <a:buChar char="•"/>
+              </a:pPr>
+              <a:r>
+                <a:rPr lang="fr-FR" sz="1200" dirty="0"/>
+                <a:t>AFIT (variance globale du modèle corrigé par le nb de paramètres à estimer) : 0.43</a:t>
+              </a:r>
+            </a:p>
+            <a:p>
+              <a:pPr marL="171450" indent="-171450">
+                <a:buFont typeface="Arial" panose="020B0604020202020204" pitchFamily="34" charset="0"/>
+                <a:buChar char="•"/>
+              </a:pPr>
+              <a:r>
+                <a:rPr lang="fr-FR" sz="1200" dirty="0"/>
+                <a:t>FIT_M (variance du modèle entre VL et VO): 0.5</a:t>
+              </a:r>
+            </a:p>
+            <a:p>
+              <a:pPr marL="171450" indent="-171450">
+                <a:buFont typeface="Arial" panose="020B0604020202020204" pitchFamily="34" charset="0"/>
+                <a:buChar char="•"/>
+              </a:pPr>
+              <a:r>
+                <a:rPr lang="fr-FR" sz="1200" dirty="0"/>
+                <a:t>FIT_S (variance du modèle des liens entre VL): 0.75</a:t>
+              </a:r>
+            </a:p>
+          </p:txBody>
+        </p:sp>
+      </p:grpSp>
+      <p:pic>
+        <p:nvPicPr>
+          <p:cNvPr id="4" name="Image 3">
+            <a:extLst>
+              <a:ext uri="{FF2B5EF4-FFF2-40B4-BE49-F238E27FC236}">
+                <a16:creationId xmlns:a16="http://schemas.microsoft.com/office/drawing/2014/main" id="{AC85D8AC-D41F-4B2D-8606-8D070674F0F9}"/>
+              </a:ext>
+            </a:extLst>
+          </p:cNvPr>
+          <p:cNvPicPr>
+            <a:picLocks noChangeAspect="1"/>
+          </p:cNvPicPr>
+          <p:nvPr/>
+        </p:nvPicPr>
+        <p:blipFill>
+          <a:blip r:embed="rId2"/>
+          <a:stretch>
+            <a:fillRect/>
+          </a:stretch>
+        </p:blipFill>
+        <p:spPr>
+          <a:xfrm>
+            <a:off x="183143" y="1163902"/>
+            <a:ext cx="7841186" cy="5119452"/>
+          </a:xfrm>
+          <a:prstGeom prst="rect">
+            <a:avLst/>
+          </a:prstGeom>
+        </p:spPr>
+      </p:pic>
+    </p:spTree>
+    <p:extLst>
+      <p:ext uri="{BB962C8B-B14F-4D97-AF65-F5344CB8AC3E}">
+        <p14:creationId xmlns:p14="http://schemas.microsoft.com/office/powerpoint/2010/main" val="2004503249"/>
+      </p:ext>
+    </p:extLst>
+  </p:cSld>
+  <p:clrMapOvr>
+    <a:masterClrMapping/>
+  </p:clrMapOvr>
+</p:sld>
+</file>
+
+<file path=ppt/slides/slide7.xml><?xml version="1.0" encoding="utf-8"?>
+<p:sld xmlns:a="http://schemas.openxmlformats.org/drawingml/2006/main" xmlns:r="http://schemas.openxmlformats.org/officeDocument/2006/relationships" xmlns:p="http://schemas.openxmlformats.org/presentationml/2006/main">
+  <p:cSld>
+    <p:spTree>
+      <p:nvGrpSpPr>
+        <p:cNvPr id="1" name=""/>
+        <p:cNvGrpSpPr/>
+        <p:nvPr/>
+      </p:nvGrpSpPr>
+      <p:grpSpPr>
+        <a:xfrm>
+          <a:off x="0" y="0"/>
+          <a:ext cx="0" cy="0"/>
+          <a:chOff x="0" y="0"/>
+          <a:chExt cx="0" cy="0"/>
+        </a:xfrm>
+      </p:grpSpPr>
+      <p:pic>
+        <p:nvPicPr>
+          <p:cNvPr id="10" name="Image 9">
+            <a:extLst>
+              <a:ext uri="{FF2B5EF4-FFF2-40B4-BE49-F238E27FC236}">
+                <a16:creationId xmlns:a16="http://schemas.microsoft.com/office/drawing/2014/main" id="{4C515769-5B3D-438F-91F8-E34514007FE8}"/>
+              </a:ext>
+            </a:extLst>
+          </p:cNvPr>
+          <p:cNvPicPr>
+            <a:picLocks noChangeAspect="1"/>
+          </p:cNvPicPr>
+          <p:nvPr/>
+        </p:nvPicPr>
+        <p:blipFill>
+          <a:blip r:embed="rId2">
+            <a:extLst>
+              <a:ext uri="{28A0092B-C50C-407E-A947-70E740481C1C}">
+                <a14:useLocalDpi xmlns:a14="http://schemas.microsoft.com/office/drawing/2010/main" val="0"/>
+              </a:ext>
+            </a:extLst>
+          </a:blip>
+          <a:srcRect/>
+          <a:stretch/>
+        </p:blipFill>
+        <p:spPr>
+          <a:xfrm>
+            <a:off x="2667000" y="0"/>
+            <a:ext cx="6858000" cy="6858000"/>
+          </a:xfrm>
+          <a:prstGeom prst="rect">
+            <a:avLst/>
+          </a:prstGeom>
+        </p:spPr>
+      </p:pic>
+      <p:sp>
+        <p:nvSpPr>
+          <p:cNvPr id="2" name="Rectangle : carré corné 1">
+            <a:extLst>
+              <a:ext uri="{FF2B5EF4-FFF2-40B4-BE49-F238E27FC236}">
+                <a16:creationId xmlns:a16="http://schemas.microsoft.com/office/drawing/2014/main" id="{BFB28677-11DA-4608-8F21-FBC0FE5957EB}"/>
+              </a:ext>
+            </a:extLst>
+          </p:cNvPr>
+          <p:cNvSpPr/>
+          <p:nvPr/>
+        </p:nvSpPr>
+        <p:spPr>
+          <a:xfrm>
+            <a:off x="209725" y="620785"/>
+            <a:ext cx="2298583" cy="5251509"/>
+          </a:xfrm>
+          <a:prstGeom prst="foldedCorner">
+            <a:avLst/>
+          </a:prstGeom>
+          <a:solidFill>
+            <a:schemeClr val="bg1">
+              <a:lumMod val="85000"/>
+            </a:schemeClr>
+          </a:solidFill>
+        </p:spPr>
+        <p:style>
+          <a:lnRef idx="2">
+            <a:schemeClr val="accent1">
+              <a:shade val="50000"/>
+            </a:schemeClr>
+          </a:lnRef>
+          <a:fillRef idx="1">
+            <a:schemeClr val="accent1"/>
+          </a:fillRef>
+          <a:effectRef idx="0">
+            <a:schemeClr val="accent1"/>
+          </a:effectRef>
+          <a:fontRef idx="minor">
+            <a:schemeClr val="lt1"/>
+          </a:fontRef>
+        </p:style>
+        <p:txBody>
+          <a:bodyPr rtlCol="0" anchor="ctr"/>
+          <a:lstStyle/>
+          <a:p>
+            <a:pPr algn="ctr"/>
+            <a:endParaRPr lang="fr-FR"/>
+          </a:p>
+        </p:txBody>
+      </p:sp>
+      <p:sp>
+        <p:nvSpPr>
+          <p:cNvPr id="3" name="ZoneTexte 2">
+            <a:extLst>
+              <a:ext uri="{FF2B5EF4-FFF2-40B4-BE49-F238E27FC236}">
+                <a16:creationId xmlns:a16="http://schemas.microsoft.com/office/drawing/2014/main" id="{BA51F41B-C70C-48EF-90D9-550EFF142915}"/>
+              </a:ext>
+            </a:extLst>
+          </p:cNvPr>
+          <p:cNvSpPr txBox="1"/>
+          <p:nvPr/>
+        </p:nvSpPr>
+        <p:spPr>
+          <a:xfrm>
+            <a:off x="302004" y="746620"/>
+            <a:ext cx="2072080" cy="4401205"/>
+          </a:xfrm>
+          <a:prstGeom prst="rect">
+            <a:avLst/>
+          </a:prstGeom>
+          <a:noFill/>
+        </p:spPr>
+        <p:txBody>
+          <a:bodyPr wrap="square" rtlCol="0">
+            <a:spAutoFit/>
+          </a:bodyPr>
+          <a:lstStyle/>
+          <a:p>
+            <a:r>
+              <a:rPr lang="fr-FR" sz="1400" u="sng" dirty="0"/>
+              <a:t>Block AMC:</a:t>
+            </a:r>
+          </a:p>
+          <a:p>
+            <a:pPr marL="285750" indent="-285750">
+              <a:buFont typeface="Arial" panose="020B0604020202020204" pitchFamily="34" charset="0"/>
+              <a:buChar char="•"/>
+            </a:pPr>
+            <a:r>
+              <a:rPr lang="fr-FR" sz="1400" dirty="0"/>
+              <a:t>AMC EHPAD FQ (+)</a:t>
+            </a:r>
+          </a:p>
+          <a:p>
+            <a:pPr marL="285750" indent="-285750">
+              <a:buFont typeface="Arial" panose="020B0604020202020204" pitchFamily="34" charset="0"/>
+              <a:buChar char="•"/>
+            </a:pPr>
+            <a:r>
+              <a:rPr lang="fr-FR" sz="1400" dirty="0"/>
+              <a:t>AMC ES totale (+)</a:t>
+            </a:r>
+          </a:p>
+          <a:p>
+            <a:pPr marL="285750" indent="-285750">
+              <a:buFont typeface="Arial" panose="020B0604020202020204" pitchFamily="34" charset="0"/>
+              <a:buChar char="•"/>
+            </a:pPr>
+            <a:r>
+              <a:rPr lang="fr-FR" sz="1400" dirty="0"/>
+              <a:t>AMC ville totale (+)</a:t>
+            </a:r>
+          </a:p>
+          <a:p>
+            <a:r>
+              <a:rPr lang="fr-FR" sz="1400" u="sng" dirty="0"/>
+              <a:t>Block </a:t>
+            </a:r>
+            <a:r>
+              <a:rPr lang="fr-FR" sz="1400" u="sng" dirty="0" err="1"/>
+              <a:t>Humans</a:t>
+            </a:r>
+            <a:r>
+              <a:rPr lang="fr-FR" sz="1400" u="sng" dirty="0"/>
+              <a:t>:</a:t>
+            </a:r>
+          </a:p>
+          <a:p>
+            <a:pPr marL="285750" indent="-285750">
+              <a:buFont typeface="Arial" panose="020B0604020202020204" pitchFamily="34" charset="0"/>
+              <a:buChar char="•"/>
+            </a:pPr>
+            <a:r>
+              <a:rPr lang="fr-FR" sz="1400" dirty="0" err="1"/>
+              <a:t>Medecins</a:t>
+            </a:r>
+            <a:r>
+              <a:rPr lang="fr-FR" sz="1400" dirty="0"/>
+              <a:t>/</a:t>
+            </a:r>
+            <a:r>
+              <a:rPr lang="fr-FR" sz="1400" dirty="0" err="1"/>
+              <a:t>hab</a:t>
+            </a:r>
+            <a:r>
+              <a:rPr lang="fr-FR" sz="1400" dirty="0"/>
+              <a:t> (+)</a:t>
+            </a:r>
+          </a:p>
+          <a:p>
+            <a:pPr marL="285750" indent="-285750">
+              <a:buFont typeface="Arial" panose="020B0604020202020204" pitchFamily="34" charset="0"/>
+              <a:buChar char="•"/>
+            </a:pPr>
+            <a:r>
+              <a:rPr lang="fr-FR" sz="1400" dirty="0"/>
+              <a:t>Pop 75 plus (+)</a:t>
+            </a:r>
+          </a:p>
+          <a:p>
+            <a:r>
+              <a:rPr lang="fr-FR" sz="1400" u="sng" dirty="0"/>
+              <a:t>Block </a:t>
+            </a:r>
+            <a:r>
+              <a:rPr lang="fr-FR" sz="1400" u="sng" dirty="0" err="1"/>
+              <a:t>Environment</a:t>
+            </a:r>
+            <a:r>
+              <a:rPr lang="fr-FR" sz="1400" u="sng" dirty="0"/>
+              <a:t>:</a:t>
+            </a:r>
+          </a:p>
+          <a:p>
+            <a:pPr marL="285750" indent="-285750">
+              <a:buFont typeface="Arial" panose="020B0604020202020204" pitchFamily="34" charset="0"/>
+              <a:buChar char="•"/>
+            </a:pPr>
+            <a:r>
+              <a:rPr lang="fr-FR" sz="1400" dirty="0"/>
+              <a:t>Air PM25 (+)</a:t>
+            </a:r>
+          </a:p>
+          <a:p>
+            <a:pPr marL="285750" indent="-285750">
+              <a:buFont typeface="Arial" panose="020B0604020202020204" pitchFamily="34" charset="0"/>
+              <a:buChar char="•"/>
+            </a:pPr>
+            <a:r>
+              <a:rPr lang="fr-FR" sz="1400" dirty="0"/>
+              <a:t>DJU froid (+)</a:t>
+            </a:r>
+          </a:p>
+          <a:p>
+            <a:r>
+              <a:rPr lang="fr-FR" sz="1400" u="sng" dirty="0"/>
+              <a:t>Block Animals:</a:t>
+            </a:r>
+          </a:p>
+          <a:p>
+            <a:pPr marL="285750" indent="-285750">
+              <a:buFont typeface="Arial" panose="020B0604020202020204" pitchFamily="34" charset="0"/>
+              <a:buChar char="•"/>
+            </a:pPr>
+            <a:r>
+              <a:rPr lang="fr-FR" sz="1400" dirty="0"/>
+              <a:t>AMR animaux de production FQ (+)</a:t>
+            </a:r>
+          </a:p>
+          <a:p>
+            <a:pPr marL="285750" indent="-285750">
+              <a:buFont typeface="Arial" panose="020B0604020202020204" pitchFamily="34" charset="0"/>
+              <a:buChar char="•"/>
+            </a:pPr>
+            <a:r>
+              <a:rPr lang="fr-FR" sz="1400" dirty="0"/>
+              <a:t>Nb de vetos par animaux de compagnie (+)</a:t>
+            </a:r>
+          </a:p>
+          <a:p>
+            <a:pPr marL="285750" indent="-285750">
+              <a:buFont typeface="Arial" panose="020B0604020202020204" pitchFamily="34" charset="0"/>
+              <a:buChar char="•"/>
+            </a:pPr>
+            <a:r>
+              <a:rPr lang="fr-FR" sz="1400" dirty="0"/>
+              <a:t>Densité animaux de production (+)</a:t>
+            </a:r>
+          </a:p>
+          <a:p>
+            <a:pPr marL="285750" indent="-285750">
+              <a:buFont typeface="Arial" panose="020B0604020202020204" pitchFamily="34" charset="0"/>
+              <a:buChar char="•"/>
+            </a:pPr>
+            <a:r>
+              <a:rPr lang="fr-FR" sz="1400" dirty="0"/>
+              <a:t>Taux de possession de chats (+)</a:t>
+            </a:r>
+          </a:p>
+        </p:txBody>
+      </p:sp>
+    </p:spTree>
+    <p:extLst>
+      <p:ext uri="{BB962C8B-B14F-4D97-AF65-F5344CB8AC3E}">
+        <p14:creationId xmlns:p14="http://schemas.microsoft.com/office/powerpoint/2010/main" val="3065694509"/>
+      </p:ext>
+    </p:extLst>
+  </p:cSld>
+  <p:clrMapOvr>
+    <a:masterClrMapping/>
+  </p:clrMapOvr>
+</p:sld>
+</file>
+
+<file path=ppt/slides/slide8.xml><?xml version="1.0" encoding="utf-8"?>
+<p:sld xmlns:a="http://schemas.openxmlformats.org/drawingml/2006/main" xmlns:r="http://schemas.openxmlformats.org/officeDocument/2006/relationships" xmlns:p="http://schemas.openxmlformats.org/presentationml/2006/main">
+  <p:cSld>
+    <p:spTree>
+      <p:nvGrpSpPr>
+        <p:cNvPr id="1" name=""/>
+        <p:cNvGrpSpPr/>
+        <p:nvPr/>
+      </p:nvGrpSpPr>
+      <p:grpSpPr>
+        <a:xfrm>
+          <a:off x="0" y="0"/>
+          <a:ext cx="0" cy="0"/>
+          <a:chOff x="0" y="0"/>
+          <a:chExt cx="0" cy="0"/>
+        </a:xfrm>
+      </p:grpSpPr>
+      <p:sp>
+        <p:nvSpPr>
+          <p:cNvPr id="2" name="Titre 1">
+            <a:extLst>
+              <a:ext uri="{FF2B5EF4-FFF2-40B4-BE49-F238E27FC236}">
+                <a16:creationId xmlns:a16="http://schemas.microsoft.com/office/drawing/2014/main" id="{DBAE983D-80F2-4D13-9354-EA2BA22BB7B3}"/>
+              </a:ext>
+            </a:extLst>
+          </p:cNvPr>
+          <p:cNvSpPr>
+            <a:spLocks noGrp="1"/>
+          </p:cNvSpPr>
+          <p:nvPr>
+            <p:ph type="ctrTitle"/>
+          </p:nvPr>
+        </p:nvSpPr>
+        <p:spPr/>
+        <p:txBody>
+          <a:bodyPr/>
+          <a:lstStyle/>
+          <a:p>
+            <a:r>
+              <a:rPr lang="fr-FR" dirty="0"/>
+              <a:t>AMR ES FQ</a:t>
+            </a:r>
+          </a:p>
+        </p:txBody>
+      </p:sp>
+    </p:spTree>
+    <p:extLst>
+      <p:ext uri="{BB962C8B-B14F-4D97-AF65-F5344CB8AC3E}">
+        <p14:creationId xmlns:p14="http://schemas.microsoft.com/office/powerpoint/2010/main" val="2884497861"/>
+      </p:ext>
+    </p:extLst>
+  </p:cSld>
+  <p:clrMapOvr>
+    <a:masterClrMapping/>
+  </p:clrMapOvr>
+</p:sld>
+</file>
+
+<file path=ppt/slides/slide9.xml><?xml version="1.0" encoding="utf-8"?>
+<p:sld xmlns:a="http://schemas.openxmlformats.org/drawingml/2006/main" xmlns:r="http://schemas.openxmlformats.org/officeDocument/2006/relationships" xmlns:p="http://schemas.openxmlformats.org/presentationml/2006/main">
+  <p:cSld>
+    <p:spTree>
+      <p:nvGrpSpPr>
+        <p:cNvPr id="1" name=""/>
+        <p:cNvGrpSpPr/>
+        <p:nvPr/>
+      </p:nvGrpSpPr>
+      <p:grpSpPr>
+        <a:xfrm>
+          <a:off x="0" y="0"/>
+          <a:ext cx="0" cy="0"/>
+          <a:chOff x="0" y="0"/>
+          <a:chExt cx="0" cy="0"/>
+        </a:xfrm>
+      </p:grpSpPr>
+      <p:sp>
+        <p:nvSpPr>
+          <p:cNvPr id="2" name="Titre 1">
+            <a:extLst>
+              <a:ext uri="{FF2B5EF4-FFF2-40B4-BE49-F238E27FC236}">
+                <a16:creationId xmlns:a16="http://schemas.microsoft.com/office/drawing/2014/main" id="{89530B02-42EB-42A6-98A3-D028D7F62B7A}"/>
+              </a:ext>
+            </a:extLst>
+          </p:cNvPr>
+          <p:cNvSpPr>
+            <a:spLocks noGrp="1"/>
+          </p:cNvSpPr>
+          <p:nvPr>
+            <p:ph type="title"/>
+          </p:nvPr>
+        </p:nvSpPr>
+        <p:spPr>
+          <a:xfrm>
+            <a:off x="418035" y="289826"/>
+            <a:ext cx="10515600" cy="750611"/>
+          </a:xfrm>
+        </p:spPr>
+        <p:txBody>
+          <a:bodyPr/>
+          <a:lstStyle/>
+          <a:p>
+            <a:r>
+              <a:rPr lang="fr-FR" dirty="0"/>
+              <a:t>Graphe du modèle</a:t>
+            </a:r>
+          </a:p>
+        </p:txBody>
+      </p:sp>
+      <p:grpSp>
+        <p:nvGrpSpPr>
+          <p:cNvPr id="8" name="Groupe 7">
+            <a:extLst>
+              <a:ext uri="{FF2B5EF4-FFF2-40B4-BE49-F238E27FC236}">
+                <a16:creationId xmlns:a16="http://schemas.microsoft.com/office/drawing/2014/main" id="{6D79E95E-0AD4-4D8C-BEA1-1160FAFC3588}"/>
+              </a:ext>
+            </a:extLst>
+          </p:cNvPr>
+          <p:cNvGrpSpPr/>
+          <p:nvPr/>
+        </p:nvGrpSpPr>
+        <p:grpSpPr>
+          <a:xfrm>
+            <a:off x="8787467" y="2374489"/>
+            <a:ext cx="2877424" cy="1686188"/>
+            <a:chOff x="8737133" y="1502034"/>
+            <a:chExt cx="2877424" cy="1686188"/>
+          </a:xfrm>
+        </p:grpSpPr>
+        <p:sp>
+          <p:nvSpPr>
+            <p:cNvPr id="6" name="Rectangle : carré corné 5">
+              <a:extLst>
+                <a:ext uri="{FF2B5EF4-FFF2-40B4-BE49-F238E27FC236}">
+                  <a16:creationId xmlns:a16="http://schemas.microsoft.com/office/drawing/2014/main" id="{AB167A05-8477-4AF9-BA6C-1482FCA752F1}"/>
+                </a:ext>
+              </a:extLst>
+            </p:cNvPr>
+            <p:cNvSpPr/>
+            <p:nvPr/>
+          </p:nvSpPr>
+          <p:spPr>
+            <a:xfrm>
+              <a:off x="8737133" y="1502034"/>
+              <a:ext cx="2877424" cy="1686188"/>
+            </a:xfrm>
+            <a:prstGeom prst="foldedCorner">
+              <a:avLst/>
+            </a:prstGeom>
+            <a:solidFill>
+              <a:schemeClr val="bg2"/>
+            </a:solidFill>
+          </p:spPr>
+          <p:style>
+            <a:lnRef idx="2">
+              <a:schemeClr val="accent1">
+                <a:shade val="50000"/>
+              </a:schemeClr>
+            </a:lnRef>
+            <a:fillRef idx="1">
+              <a:schemeClr val="accent1"/>
+            </a:fillRef>
+            <a:effectRef idx="0">
+              <a:schemeClr val="accent1"/>
+            </a:effectRef>
+            <a:fontRef idx="minor">
+              <a:schemeClr val="lt1"/>
+            </a:fontRef>
+          </p:style>
+          <p:txBody>
+            <a:bodyPr rtlCol="0" anchor="ctr"/>
+            <a:lstStyle/>
+            <a:p>
+              <a:pPr algn="ctr"/>
+              <a:endParaRPr lang="fr-FR"/>
+            </a:p>
+          </p:txBody>
+        </p:sp>
+        <p:sp>
+          <p:nvSpPr>
+            <p:cNvPr id="7" name="ZoneTexte 6">
+              <a:extLst>
+                <a:ext uri="{FF2B5EF4-FFF2-40B4-BE49-F238E27FC236}">
+                  <a16:creationId xmlns:a16="http://schemas.microsoft.com/office/drawing/2014/main" id="{4862162D-BEE4-4B1F-B905-D2F0635B5F2A}"/>
+                </a:ext>
+              </a:extLst>
+            </p:cNvPr>
+            <p:cNvSpPr txBox="1"/>
+            <p:nvPr/>
+          </p:nvSpPr>
+          <p:spPr>
+            <a:xfrm>
+              <a:off x="8883941" y="1652631"/>
+              <a:ext cx="2583809" cy="1384995"/>
+            </a:xfrm>
+            <a:prstGeom prst="rect">
+              <a:avLst/>
+            </a:prstGeom>
+            <a:noFill/>
+          </p:spPr>
+          <p:txBody>
+            <a:bodyPr wrap="square" rtlCol="0">
+              <a:spAutoFit/>
+            </a:bodyPr>
+            <a:lstStyle/>
+            <a:p>
+              <a:pPr marL="171450" indent="-171450">
+                <a:buFont typeface="Arial" panose="020B0604020202020204" pitchFamily="34" charset="0"/>
+                <a:buChar char="•"/>
+              </a:pPr>
+              <a:r>
+                <a:rPr lang="fr-FR" sz="1200" dirty="0"/>
+                <a:t>AFIT (variance globale du modèle corrigé par le nb de paramètres à estimer) : 0.53</a:t>
+              </a:r>
+            </a:p>
+            <a:p>
+              <a:pPr marL="171450" indent="-171450">
+                <a:buFont typeface="Arial" panose="020B0604020202020204" pitchFamily="34" charset="0"/>
+                <a:buChar char="•"/>
+              </a:pPr>
+              <a:r>
+                <a:rPr lang="fr-FR" sz="1200" dirty="0"/>
+                <a:t>FIT_M (variance du modèle entre VL et VO): 0.58</a:t>
+              </a:r>
+            </a:p>
+            <a:p>
+              <a:pPr marL="171450" indent="-171450">
+                <a:buFont typeface="Arial" panose="020B0604020202020204" pitchFamily="34" charset="0"/>
+                <a:buChar char="•"/>
+              </a:pPr>
+              <a:r>
+                <a:rPr lang="fr-FR" sz="1200" dirty="0"/>
+                <a:t>FIT_S (variance du modèle des liens entre VL): 0.79</a:t>
+              </a:r>
+            </a:p>
+          </p:txBody>
+        </p:sp>
+      </p:grpSp>
+      <p:pic>
+        <p:nvPicPr>
+          <p:cNvPr id="1026" name="Picture 2">
+            <a:extLst>
+              <a:ext uri="{FF2B5EF4-FFF2-40B4-BE49-F238E27FC236}">
+                <a16:creationId xmlns:a16="http://schemas.microsoft.com/office/drawing/2014/main" id="{20D7DE0F-7694-48E5-96C2-7B511681E12A}"/>
+              </a:ext>
+            </a:extLst>
+          </p:cNvPr>
+          <p:cNvPicPr>
+            <a:picLocks noChangeAspect="1" noChangeArrowheads="1"/>
+          </p:cNvPicPr>
+          <p:nvPr/>
+        </p:nvPicPr>
+        <p:blipFill>
+          <a:blip r:embed="rId2">
+            <a:extLst>
+              <a:ext uri="{28A0092B-C50C-407E-A947-70E740481C1C}">
+                <a14:useLocalDpi xmlns:a14="http://schemas.microsoft.com/office/drawing/2010/main" val="0"/>
+              </a:ext>
+            </a:extLst>
+          </a:blip>
+          <a:srcRect/>
+          <a:stretch>
+            <a:fillRect/>
+          </a:stretch>
+        </p:blipFill>
+        <p:spPr bwMode="auto">
+          <a:xfrm>
+            <a:off x="292200" y="1120742"/>
+            <a:ext cx="7585062" cy="5417902"/>
+          </a:xfrm>
+          <a:prstGeom prst="rect">
+            <a:avLst/>
+          </a:prstGeom>
+          <a:noFill/>
+          <a:extLst>
+            <a:ext uri="{909E8E84-426E-40DD-AFC4-6F175D3DCCD1}">
+              <a14:hiddenFill xmlns:a14="http://schemas.microsoft.com/office/drawing/2010/main">
+                <a:solidFill>
+                  <a:srgbClr val="FFFFFF"/>
+                </a:solidFill>
+              </a14:hiddenFill>
+            </a:ext>
+          </a:extLst>
+        </p:spPr>
+      </p:pic>
+    </p:spTree>
+    <p:extLst>
+      <p:ext uri="{BB962C8B-B14F-4D97-AF65-F5344CB8AC3E}">
+        <p14:creationId xmlns:p14="http://schemas.microsoft.com/office/powerpoint/2010/main" val="2206859601"/>
       </p:ext>
     </p:extLst>
   </p:cSld>
